--- a/material/5_AI/08_머신러닝 기초.pptx
+++ b/material/5_AI/08_머신러닝 기초.pptx
@@ -5,10 +5,10 @@
     <p:sldMasterId id="2147483660" r:id="rId1"/>
   </p:sldMasterIdLst>
   <p:notesMasterIdLst>
-    <p:notesMasterId r:id="rId42"/>
+    <p:notesMasterId r:id="rId44"/>
   </p:notesMasterIdLst>
   <p:sldIdLst>
-    <p:sldId id="1004" r:id="rId2"/>
+    <p:sldId id="1013" r:id="rId2"/>
     <p:sldId id="635" r:id="rId3"/>
     <p:sldId id="681" r:id="rId4"/>
     <p:sldId id="698" r:id="rId5"/>
@@ -47,7 +47,9 @@
     <p:sldId id="692" r:id="rId38"/>
     <p:sldId id="693" r:id="rId39"/>
     <p:sldId id="690" r:id="rId40"/>
-    <p:sldId id="836" r:id="rId41"/>
+    <p:sldId id="1029" r:id="rId41"/>
+    <p:sldId id="1030" r:id="rId42"/>
+    <p:sldId id="836" r:id="rId43"/>
   </p:sldIdLst>
   <p:sldSz cx="12192000" cy="6858000"/>
   <p:notesSz cx="6858000" cy="9144000"/>
@@ -257,7 +259,7 @@
             <a:fld id="{A13A867C-D490-40C2-AB8D-A60FA70A9BF5}" type="datetimeFigureOut">
               <a:rPr lang="ko-KR" altLang="en-US" smtClean="0"/>
               <a:pPr/>
-              <a:t>2025-09-17</a:t>
+              <a:t>2026-02-10</a:t>
             </a:fld>
             <a:endParaRPr lang="ko-KR" altLang="en-US" dirty="0"/>
           </a:p>
@@ -695,9 +697,178 @@
           <a:bodyPr/>
           <a:lstStyle/>
           <a:p>
+            <a:fld id="{3E35EA20-6519-4513-9EDC-C89C5369BAEC}" type="slidenum">
+              <a:rPr lang="ko-KR" altLang="en-US" smtClean="0"/>
+              <a:pPr/>
+              <a:t>17</a:t>
+            </a:fld>
+            <a:endParaRPr lang="ko-KR" altLang="en-US" dirty="0"/>
+          </a:p>
+        </p:txBody>
+      </p:sp>
+    </p:spTree>
+    <p:extLst>
+      <p:ext uri="{BB962C8B-B14F-4D97-AF65-F5344CB8AC3E}">
+        <p14:creationId xmlns:p14="http://schemas.microsoft.com/office/powerpoint/2010/main" val="2131754256"/>
+      </p:ext>
+    </p:extLst>
+  </p:cSld>
+  <p:clrMapOvr>
+    <a:masterClrMapping/>
+  </p:clrMapOvr>
+</p:notes>
+</file>
+
+<file path=ppt/notesSlides/notesSlide11.xml><?xml version="1.0" encoding="utf-8"?>
+<p:notes xmlns:a="http://schemas.openxmlformats.org/drawingml/2006/main" xmlns:r="http://schemas.openxmlformats.org/officeDocument/2006/relationships" xmlns:p="http://schemas.openxmlformats.org/presentationml/2006/main">
+  <p:cSld>
+    <p:spTree>
+      <p:nvGrpSpPr>
+        <p:cNvPr id="1" name=""/>
+        <p:cNvGrpSpPr/>
+        <p:nvPr/>
+      </p:nvGrpSpPr>
+      <p:grpSpPr>
+        <a:xfrm>
+          <a:off x="0" y="0"/>
+          <a:ext cx="0" cy="0"/>
+          <a:chOff x="0" y="0"/>
+          <a:chExt cx="0" cy="0"/>
+        </a:xfrm>
+      </p:grpSpPr>
+      <p:sp>
+        <p:nvSpPr>
+          <p:cNvPr id="2" name="슬라이드 이미지 개체 틀 1"/>
+          <p:cNvSpPr>
+            <a:spLocks noGrp="1" noRot="1" noChangeAspect="1"/>
+          </p:cNvSpPr>
+          <p:nvPr>
+            <p:ph type="sldImg"/>
+          </p:nvPr>
+        </p:nvSpPr>
+        <p:spPr/>
+      </p:sp>
+      <p:sp>
+        <p:nvSpPr>
+          <p:cNvPr id="3" name="슬라이드 노트 개체 틀 2"/>
+          <p:cNvSpPr>
+            <a:spLocks noGrp="1"/>
+          </p:cNvSpPr>
+          <p:nvPr>
+            <p:ph type="body" idx="1"/>
+          </p:nvPr>
+        </p:nvSpPr>
+        <p:spPr/>
+        <p:txBody>
+          <a:bodyPr/>
+          <a:lstStyle/>
+          <a:p>
+            <a:endParaRPr lang="ko-KR" altLang="en-US" dirty="0"/>
+          </a:p>
+        </p:txBody>
+      </p:sp>
+      <p:sp>
+        <p:nvSpPr>
+          <p:cNvPr id="4" name="슬라이드 번호 개체 틀 3"/>
+          <p:cNvSpPr>
+            <a:spLocks noGrp="1"/>
+          </p:cNvSpPr>
+          <p:nvPr>
+            <p:ph type="sldNum" sz="quarter" idx="10"/>
+          </p:nvPr>
+        </p:nvSpPr>
+        <p:spPr/>
+        <p:txBody>
+          <a:bodyPr/>
+          <a:lstStyle/>
+          <a:p>
             <a:fld id="{C09E5BFC-1559-42F1-8940-AB342D56BF02}" type="slidenum">
               <a:rPr lang="ko-KR" altLang="en-US" smtClean="0"/>
-              <a:t>25</a:t>
+              <a:t>18</a:t>
+            </a:fld>
+            <a:endParaRPr lang="ko-KR" altLang="en-US"/>
+          </a:p>
+        </p:txBody>
+      </p:sp>
+    </p:spTree>
+    <p:extLst>
+      <p:ext uri="{BB962C8B-B14F-4D97-AF65-F5344CB8AC3E}">
+        <p14:creationId xmlns:p14="http://schemas.microsoft.com/office/powerpoint/2010/main" val="816646178"/>
+      </p:ext>
+    </p:extLst>
+  </p:cSld>
+  <p:clrMapOvr>
+    <a:masterClrMapping/>
+  </p:clrMapOvr>
+</p:notes>
+</file>
+
+<file path=ppt/notesSlides/notesSlide12.xml><?xml version="1.0" encoding="utf-8"?>
+<p:notes xmlns:a="http://schemas.openxmlformats.org/drawingml/2006/main" xmlns:r="http://schemas.openxmlformats.org/officeDocument/2006/relationships" xmlns:p="http://schemas.openxmlformats.org/presentationml/2006/main">
+  <p:cSld>
+    <p:spTree>
+      <p:nvGrpSpPr>
+        <p:cNvPr id="1" name=""/>
+        <p:cNvGrpSpPr/>
+        <p:nvPr/>
+      </p:nvGrpSpPr>
+      <p:grpSpPr>
+        <a:xfrm>
+          <a:off x="0" y="0"/>
+          <a:ext cx="0" cy="0"/>
+          <a:chOff x="0" y="0"/>
+          <a:chExt cx="0" cy="0"/>
+        </a:xfrm>
+      </p:grpSpPr>
+      <p:sp>
+        <p:nvSpPr>
+          <p:cNvPr id="2" name="슬라이드 이미지 개체 틀 1"/>
+          <p:cNvSpPr>
+            <a:spLocks noGrp="1" noRot="1" noChangeAspect="1"/>
+          </p:cNvSpPr>
+          <p:nvPr>
+            <p:ph type="sldImg"/>
+          </p:nvPr>
+        </p:nvSpPr>
+        <p:spPr/>
+      </p:sp>
+      <p:sp>
+        <p:nvSpPr>
+          <p:cNvPr id="3" name="슬라이드 노트 개체 틀 2"/>
+          <p:cNvSpPr>
+            <a:spLocks noGrp="1"/>
+          </p:cNvSpPr>
+          <p:nvPr>
+            <p:ph type="body" idx="1"/>
+          </p:nvPr>
+        </p:nvSpPr>
+        <p:spPr/>
+        <p:txBody>
+          <a:bodyPr/>
+          <a:lstStyle/>
+          <a:p>
+            <a:endParaRPr lang="ko-KR" altLang="en-US" dirty="0"/>
+          </a:p>
+        </p:txBody>
+      </p:sp>
+      <p:sp>
+        <p:nvSpPr>
+          <p:cNvPr id="4" name="슬라이드 번호 개체 틀 3"/>
+          <p:cNvSpPr>
+            <a:spLocks noGrp="1"/>
+          </p:cNvSpPr>
+          <p:nvPr>
+            <p:ph type="sldNum" sz="quarter" idx="5"/>
+          </p:nvPr>
+        </p:nvSpPr>
+        <p:spPr/>
+        <p:txBody>
+          <a:bodyPr/>
+          <a:lstStyle/>
+          <a:p>
+            <a:fld id="{C09E5BFC-1559-42F1-8940-AB342D56BF02}" type="slidenum">
+              <a:rPr lang="ko-KR" altLang="en-US" smtClean="0"/>
+              <a:t>21</a:t>
             </a:fld>
             <a:endParaRPr lang="ko-KR" altLang="en-US"/>
           </a:p>
@@ -716,7 +887,175 @@
 </p:notes>
 </file>
 
-<file path=ppt/notesSlides/notesSlide11.xml><?xml version="1.0" encoding="utf-8"?>
+<file path=ppt/notesSlides/notesSlide13.xml><?xml version="1.0" encoding="utf-8"?>
+<p:notes xmlns:a="http://schemas.openxmlformats.org/drawingml/2006/main" xmlns:r="http://schemas.openxmlformats.org/officeDocument/2006/relationships" xmlns:p="http://schemas.openxmlformats.org/presentationml/2006/main">
+  <p:cSld>
+    <p:spTree>
+      <p:nvGrpSpPr>
+        <p:cNvPr id="1" name=""/>
+        <p:cNvGrpSpPr/>
+        <p:nvPr/>
+      </p:nvGrpSpPr>
+      <p:grpSpPr>
+        <a:xfrm>
+          <a:off x="0" y="0"/>
+          <a:ext cx="0" cy="0"/>
+          <a:chOff x="0" y="0"/>
+          <a:chExt cx="0" cy="0"/>
+        </a:xfrm>
+      </p:grpSpPr>
+      <p:sp>
+        <p:nvSpPr>
+          <p:cNvPr id="2" name="슬라이드 이미지 개체 틀 1"/>
+          <p:cNvSpPr>
+            <a:spLocks noGrp="1" noRot="1" noChangeAspect="1"/>
+          </p:cNvSpPr>
+          <p:nvPr>
+            <p:ph type="sldImg"/>
+          </p:nvPr>
+        </p:nvSpPr>
+        <p:spPr/>
+      </p:sp>
+      <p:sp>
+        <p:nvSpPr>
+          <p:cNvPr id="3" name="슬라이드 노트 개체 틀 2"/>
+          <p:cNvSpPr>
+            <a:spLocks noGrp="1"/>
+          </p:cNvSpPr>
+          <p:nvPr>
+            <p:ph type="body" idx="1"/>
+          </p:nvPr>
+        </p:nvSpPr>
+        <p:spPr/>
+        <p:txBody>
+          <a:bodyPr/>
+          <a:lstStyle/>
+          <a:p>
+            <a:endParaRPr lang="ko-KR" altLang="en-US" dirty="0"/>
+          </a:p>
+        </p:txBody>
+      </p:sp>
+      <p:sp>
+        <p:nvSpPr>
+          <p:cNvPr id="4" name="슬라이드 번호 개체 틀 3"/>
+          <p:cNvSpPr>
+            <a:spLocks noGrp="1"/>
+          </p:cNvSpPr>
+          <p:nvPr>
+            <p:ph type="sldNum" sz="quarter" idx="5"/>
+          </p:nvPr>
+        </p:nvSpPr>
+        <p:spPr/>
+        <p:txBody>
+          <a:bodyPr/>
+          <a:lstStyle/>
+          <a:p>
+            <a:fld id="{C09E5BFC-1559-42F1-8940-AB342D56BF02}" type="slidenum">
+              <a:rPr lang="ko-KR" altLang="en-US" smtClean="0"/>
+              <a:t>22</a:t>
+            </a:fld>
+            <a:endParaRPr lang="ko-KR" altLang="en-US"/>
+          </a:p>
+        </p:txBody>
+      </p:sp>
+    </p:spTree>
+    <p:extLst>
+      <p:ext uri="{BB962C8B-B14F-4D97-AF65-F5344CB8AC3E}">
+        <p14:creationId xmlns:p14="http://schemas.microsoft.com/office/powerpoint/2010/main" val="3158770369"/>
+      </p:ext>
+    </p:extLst>
+  </p:cSld>
+  <p:clrMapOvr>
+    <a:masterClrMapping/>
+  </p:clrMapOvr>
+</p:notes>
+</file>
+
+<file path=ppt/notesSlides/notesSlide14.xml><?xml version="1.0" encoding="utf-8"?>
+<p:notes xmlns:a="http://schemas.openxmlformats.org/drawingml/2006/main" xmlns:r="http://schemas.openxmlformats.org/officeDocument/2006/relationships" xmlns:p="http://schemas.openxmlformats.org/presentationml/2006/main">
+  <p:cSld>
+    <p:spTree>
+      <p:nvGrpSpPr>
+        <p:cNvPr id="1" name=""/>
+        <p:cNvGrpSpPr/>
+        <p:nvPr/>
+      </p:nvGrpSpPr>
+      <p:grpSpPr>
+        <a:xfrm>
+          <a:off x="0" y="0"/>
+          <a:ext cx="0" cy="0"/>
+          <a:chOff x="0" y="0"/>
+          <a:chExt cx="0" cy="0"/>
+        </a:xfrm>
+      </p:grpSpPr>
+      <p:sp>
+        <p:nvSpPr>
+          <p:cNvPr id="2" name="슬라이드 이미지 개체 틀 1"/>
+          <p:cNvSpPr>
+            <a:spLocks noGrp="1" noRot="1" noChangeAspect="1"/>
+          </p:cNvSpPr>
+          <p:nvPr>
+            <p:ph type="sldImg"/>
+          </p:nvPr>
+        </p:nvSpPr>
+        <p:spPr/>
+      </p:sp>
+      <p:sp>
+        <p:nvSpPr>
+          <p:cNvPr id="3" name="슬라이드 노트 개체 틀 2"/>
+          <p:cNvSpPr>
+            <a:spLocks noGrp="1"/>
+          </p:cNvSpPr>
+          <p:nvPr>
+            <p:ph type="body" idx="1"/>
+          </p:nvPr>
+        </p:nvSpPr>
+        <p:spPr/>
+        <p:txBody>
+          <a:bodyPr/>
+          <a:lstStyle/>
+          <a:p>
+            <a:endParaRPr lang="ko-KR" altLang="en-US" dirty="0"/>
+          </a:p>
+        </p:txBody>
+      </p:sp>
+      <p:sp>
+        <p:nvSpPr>
+          <p:cNvPr id="4" name="슬라이드 번호 개체 틀 3"/>
+          <p:cNvSpPr>
+            <a:spLocks noGrp="1"/>
+          </p:cNvSpPr>
+          <p:nvPr>
+            <p:ph type="sldNum" sz="quarter" idx="5"/>
+          </p:nvPr>
+        </p:nvSpPr>
+        <p:spPr/>
+        <p:txBody>
+          <a:bodyPr/>
+          <a:lstStyle/>
+          <a:p>
+            <a:fld id="{C09E5BFC-1559-42F1-8940-AB342D56BF02}" type="slidenum">
+              <a:rPr lang="ko-KR" altLang="en-US" smtClean="0"/>
+              <a:t>25</a:t>
+            </a:fld>
+            <a:endParaRPr lang="ko-KR" altLang="en-US"/>
+          </a:p>
+        </p:txBody>
+      </p:sp>
+    </p:spTree>
+    <p:extLst>
+      <p:ext uri="{BB962C8B-B14F-4D97-AF65-F5344CB8AC3E}">
+        <p14:creationId xmlns:p14="http://schemas.microsoft.com/office/powerpoint/2010/main" val="3158770369"/>
+      </p:ext>
+    </p:extLst>
+  </p:cSld>
+  <p:clrMapOvr>
+    <a:masterClrMapping/>
+  </p:clrMapOvr>
+</p:notes>
+</file>
+
+<file path=ppt/notesSlides/notesSlide15.xml><?xml version="1.0" encoding="utf-8"?>
 <p:notes xmlns:a="http://schemas.openxmlformats.org/drawingml/2006/main" xmlns:r="http://schemas.openxmlformats.org/officeDocument/2006/relationships" xmlns:p="http://schemas.openxmlformats.org/presentationml/2006/main">
   <p:cSld>
     <p:spTree>
@@ -824,7 +1163,571 @@
 </p:notes>
 </file>
 
-<file path=ppt/notesSlides/notesSlide12.xml><?xml version="1.0" encoding="utf-8"?>
+<file path=ppt/notesSlides/notesSlide16.xml><?xml version="1.0" encoding="utf-8"?>
+<p:notes xmlns:a="http://schemas.openxmlformats.org/drawingml/2006/main" xmlns:r="http://schemas.openxmlformats.org/officeDocument/2006/relationships" xmlns:p="http://schemas.openxmlformats.org/presentationml/2006/main">
+  <p:cSld>
+    <p:spTree>
+      <p:nvGrpSpPr>
+        <p:cNvPr id="1" name=""/>
+        <p:cNvGrpSpPr/>
+        <p:nvPr/>
+      </p:nvGrpSpPr>
+      <p:grpSpPr>
+        <a:xfrm>
+          <a:off x="0" y="0"/>
+          <a:ext cx="0" cy="0"/>
+          <a:chOff x="0" y="0"/>
+          <a:chExt cx="0" cy="0"/>
+        </a:xfrm>
+      </p:grpSpPr>
+      <p:sp>
+        <p:nvSpPr>
+          <p:cNvPr id="2" name="슬라이드 이미지 개체 틀 1"/>
+          <p:cNvSpPr>
+            <a:spLocks noGrp="1" noRot="1" noChangeAspect="1"/>
+          </p:cNvSpPr>
+          <p:nvPr>
+            <p:ph type="sldImg"/>
+          </p:nvPr>
+        </p:nvSpPr>
+        <p:spPr/>
+      </p:sp>
+      <p:sp>
+        <p:nvSpPr>
+          <p:cNvPr id="3" name="슬라이드 노트 개체 틀 2"/>
+          <p:cNvSpPr>
+            <a:spLocks noGrp="1"/>
+          </p:cNvSpPr>
+          <p:nvPr>
+            <p:ph type="body" idx="1"/>
+          </p:nvPr>
+        </p:nvSpPr>
+        <p:spPr/>
+        <p:txBody>
+          <a:bodyPr/>
+          <a:lstStyle/>
+          <a:p>
+            <a:r>
+              <a:rPr lang="en-US" altLang="ko-KR" dirty="0"/>
+              <a:t>ANN</a:t>
+            </a:r>
+            <a:r>
+              <a:rPr lang="ko-KR" altLang="en-US" dirty="0"/>
+              <a:t>은</a:t>
+            </a:r>
+            <a:br>
+              <a:rPr lang="ko-KR" altLang="en-US" dirty="0"/>
+            </a:br>
+            <a:r>
+              <a:rPr lang="ko-KR" altLang="en-US" dirty="0"/>
+              <a:t>입력과 출력 사이의 복잡한 관계를</a:t>
+            </a:r>
+            <a:br>
+              <a:rPr lang="ko-KR" altLang="en-US" dirty="0"/>
+            </a:br>
+            <a:r>
+              <a:rPr lang="ko-KR" altLang="en-US" dirty="0"/>
+              <a:t>여러 단계로 나눠 표현하는 모델이다</a:t>
+            </a:r>
+            <a:r>
+              <a:rPr lang="en-US" altLang="ko-KR" dirty="0"/>
+              <a:t>.</a:t>
+            </a:r>
+          </a:p>
+          <a:p>
+            <a:endParaRPr lang="en-US" altLang="ko-KR" dirty="0"/>
+          </a:p>
+          <a:p>
+            <a:r>
+              <a:rPr lang="ko-KR" altLang="en-US" b="1" dirty="0"/>
+              <a:t>기존 모델의 한계</a:t>
+            </a:r>
+          </a:p>
+          <a:p>
+            <a:r>
+              <a:rPr lang="ko-KR" altLang="en-US" dirty="0"/>
+              <a:t>선형 회귀</a:t>
+            </a:r>
+            <a:r>
+              <a:rPr lang="en-US" altLang="ko-KR" dirty="0"/>
+              <a:t>: </a:t>
+            </a:r>
+            <a:r>
+              <a:rPr lang="ko-KR" altLang="en-US" dirty="0"/>
+              <a:t>직선만 표현 가능</a:t>
+            </a:r>
+          </a:p>
+          <a:p>
+            <a:r>
+              <a:rPr lang="ko-KR" altLang="en-US" dirty="0"/>
+              <a:t>실제 데이터</a:t>
+            </a:r>
+            <a:r>
+              <a:rPr lang="en-US" altLang="ko-KR" dirty="0"/>
+              <a:t>: </a:t>
+            </a:r>
+            <a:r>
+              <a:rPr lang="ko-KR" altLang="en-US" dirty="0"/>
+              <a:t>훨씬 복잡</a:t>
+            </a:r>
+          </a:p>
+          <a:p>
+            <a:r>
+              <a:rPr lang="ko-KR" altLang="en-US" dirty="0"/>
+              <a:t>“현실 데이터는</a:t>
+            </a:r>
+            <a:br>
+              <a:rPr lang="ko-KR" altLang="en-US" dirty="0"/>
+            </a:br>
+            <a:r>
+              <a:rPr lang="ko-KR" altLang="en-US" dirty="0"/>
+              <a:t>직선 하나로 설명되지 않습니다</a:t>
+            </a:r>
+            <a:r>
+              <a:rPr lang="en-US" altLang="ko-KR" dirty="0"/>
+              <a:t>.”</a:t>
+            </a:r>
+          </a:p>
+          <a:p>
+            <a:r>
+              <a:rPr lang="ko-KR" altLang="en-US" dirty="0"/>
+              <a:t>👉 그래서 </a:t>
+            </a:r>
+            <a:r>
+              <a:rPr lang="ko-KR" altLang="en-US" b="1" dirty="0"/>
+              <a:t>여러 단계를 쌓아보자</a:t>
+            </a:r>
+            <a:r>
+              <a:rPr lang="ko-KR" altLang="en-US" dirty="0"/>
+              <a:t>는 아이디어가 나옴</a:t>
+            </a:r>
+          </a:p>
+          <a:p>
+            <a:endParaRPr lang="en-US" altLang="ko-KR" dirty="0"/>
+          </a:p>
+          <a:p>
+            <a:endParaRPr lang="en-US" altLang="ko-KR" dirty="0"/>
+          </a:p>
+          <a:p>
+            <a:endParaRPr lang="en-US" altLang="ko-KR" dirty="0"/>
+          </a:p>
+          <a:p>
+            <a:r>
+              <a:rPr lang="ko-KR" altLang="en-US" dirty="0"/>
+              <a:t>“이 인공신경망 구조를</a:t>
+            </a:r>
+            <a:br>
+              <a:rPr lang="ko-KR" altLang="en-US" dirty="0"/>
+            </a:br>
+            <a:r>
+              <a:rPr lang="ko-KR" altLang="en-US" dirty="0"/>
+              <a:t>실제 코드로 구현하는 도구가</a:t>
+            </a:r>
+            <a:br>
+              <a:rPr lang="ko-KR" altLang="en-US" dirty="0"/>
+            </a:br>
+            <a:r>
+              <a:rPr lang="ko-KR" altLang="en-US" dirty="0"/>
+              <a:t>바로 </a:t>
+            </a:r>
+            <a:r>
+              <a:rPr lang="en-US" altLang="ko-KR" b="1" dirty="0" err="1"/>
+              <a:t>PyTorch</a:t>
+            </a:r>
+            <a:r>
+              <a:rPr lang="ko-KR" altLang="en-US" dirty="0"/>
+              <a:t>입니다</a:t>
+            </a:r>
+            <a:r>
+              <a:rPr lang="en-US" altLang="ko-KR" dirty="0"/>
+              <a:t>.”</a:t>
+            </a:r>
+          </a:p>
+          <a:p>
+            <a:r>
+              <a:rPr lang="en-US" altLang="ko-KR" dirty="0"/>
+              <a:t>“</a:t>
+            </a:r>
+            <a:r>
+              <a:rPr lang="ko-KR" altLang="en-US" dirty="0"/>
+              <a:t>지금은 구조를 이해하고</a:t>
+            </a:r>
+            <a:r>
+              <a:rPr lang="en-US" altLang="ko-KR" dirty="0"/>
+              <a:t>,</a:t>
+            </a:r>
+            <a:br>
+              <a:rPr lang="en-US" altLang="ko-KR" dirty="0"/>
+            </a:br>
+            <a:r>
+              <a:rPr lang="ko-KR" altLang="en-US" dirty="0"/>
+              <a:t>구현은 다음 단계에서 합니다</a:t>
+            </a:r>
+            <a:r>
+              <a:rPr lang="en-US" altLang="ko-KR" dirty="0"/>
+              <a:t>.”</a:t>
+            </a:r>
+          </a:p>
+          <a:p>
+            <a:endParaRPr lang="ko-KR" altLang="en-US" dirty="0"/>
+          </a:p>
+        </p:txBody>
+      </p:sp>
+      <p:sp>
+        <p:nvSpPr>
+          <p:cNvPr id="4" name="슬라이드 번호 개체 틀 3"/>
+          <p:cNvSpPr>
+            <a:spLocks noGrp="1"/>
+          </p:cNvSpPr>
+          <p:nvPr>
+            <p:ph type="sldNum" sz="quarter" idx="5"/>
+          </p:nvPr>
+        </p:nvSpPr>
+        <p:spPr/>
+        <p:txBody>
+          <a:bodyPr/>
+          <a:lstStyle/>
+          <a:p>
+            <a:fld id="{3E35EA20-6519-4513-9EDC-C89C5369BAEC}" type="slidenum">
+              <a:rPr lang="ko-KR" altLang="en-US" smtClean="0"/>
+              <a:pPr/>
+              <a:t>36</a:t>
+            </a:fld>
+            <a:endParaRPr lang="ko-KR" altLang="en-US" dirty="0"/>
+          </a:p>
+        </p:txBody>
+      </p:sp>
+    </p:spTree>
+    <p:extLst>
+      <p:ext uri="{BB962C8B-B14F-4D97-AF65-F5344CB8AC3E}">
+        <p14:creationId xmlns:p14="http://schemas.microsoft.com/office/powerpoint/2010/main" val="4129296451"/>
+      </p:ext>
+    </p:extLst>
+  </p:cSld>
+  <p:clrMapOvr>
+    <a:masterClrMapping/>
+  </p:clrMapOvr>
+</p:notes>
+</file>
+
+<file path=ppt/notesSlides/notesSlide17.xml><?xml version="1.0" encoding="utf-8"?>
+<p:notes xmlns:a="http://schemas.openxmlformats.org/drawingml/2006/main" xmlns:r="http://schemas.openxmlformats.org/officeDocument/2006/relationships" xmlns:p="http://schemas.openxmlformats.org/presentationml/2006/main">
+  <p:cSld>
+    <p:spTree>
+      <p:nvGrpSpPr>
+        <p:cNvPr id="1" name=""/>
+        <p:cNvGrpSpPr/>
+        <p:nvPr/>
+      </p:nvGrpSpPr>
+      <p:grpSpPr>
+        <a:xfrm>
+          <a:off x="0" y="0"/>
+          <a:ext cx="0" cy="0"/>
+          <a:chOff x="0" y="0"/>
+          <a:chExt cx="0" cy="0"/>
+        </a:xfrm>
+      </p:grpSpPr>
+      <p:sp>
+        <p:nvSpPr>
+          <p:cNvPr id="2" name="슬라이드 이미지 개체 틀 1"/>
+          <p:cNvSpPr>
+            <a:spLocks noGrp="1" noRot="1" noChangeAspect="1"/>
+          </p:cNvSpPr>
+          <p:nvPr>
+            <p:ph type="sldImg"/>
+          </p:nvPr>
+        </p:nvSpPr>
+        <p:spPr/>
+      </p:sp>
+      <p:sp>
+        <p:nvSpPr>
+          <p:cNvPr id="3" name="슬라이드 노트 개체 틀 2"/>
+          <p:cNvSpPr>
+            <a:spLocks noGrp="1"/>
+          </p:cNvSpPr>
+          <p:nvPr>
+            <p:ph type="body" idx="1"/>
+          </p:nvPr>
+        </p:nvSpPr>
+        <p:spPr/>
+        <p:txBody>
+          <a:bodyPr/>
+          <a:lstStyle/>
+          <a:p>
+            <a:r>
+              <a:rPr lang="ko-KR" altLang="en-US" dirty="0"/>
+              <a:t>“이제부터 볼 회귀와 </a:t>
+            </a:r>
+            <a:r>
+              <a:rPr lang="ko-KR" altLang="en-US" dirty="0" err="1"/>
+              <a:t>경사하강법은</a:t>
+            </a:r>
+            <a:br>
+              <a:rPr lang="ko-KR" altLang="en-US" dirty="0"/>
+            </a:br>
+            <a:r>
+              <a:rPr lang="ko-KR" altLang="en-US" dirty="0"/>
+              <a:t>이 과정을 수학적으로 표현한 것입니다</a:t>
+            </a:r>
+            <a:r>
+              <a:rPr lang="en-US" altLang="ko-KR" dirty="0"/>
+              <a:t>.”</a:t>
+            </a:r>
+            <a:endParaRPr lang="ko-KR" altLang="en-US" dirty="0"/>
+          </a:p>
+        </p:txBody>
+      </p:sp>
+      <p:sp>
+        <p:nvSpPr>
+          <p:cNvPr id="4" name="슬라이드 번호 개체 틀 3"/>
+          <p:cNvSpPr>
+            <a:spLocks noGrp="1"/>
+          </p:cNvSpPr>
+          <p:nvPr>
+            <p:ph type="sldNum" sz="quarter" idx="5"/>
+          </p:nvPr>
+        </p:nvSpPr>
+        <p:spPr/>
+        <p:txBody>
+          <a:bodyPr/>
+          <a:lstStyle/>
+          <a:p>
+            <a:fld id="{3E35EA20-6519-4513-9EDC-C89C5369BAEC}" type="slidenum">
+              <a:rPr lang="ko-KR" altLang="en-US" smtClean="0"/>
+              <a:pPr/>
+              <a:t>40</a:t>
+            </a:fld>
+            <a:endParaRPr lang="ko-KR" altLang="en-US" dirty="0"/>
+          </a:p>
+        </p:txBody>
+      </p:sp>
+    </p:spTree>
+    <p:extLst>
+      <p:ext uri="{BB962C8B-B14F-4D97-AF65-F5344CB8AC3E}">
+        <p14:creationId xmlns:p14="http://schemas.microsoft.com/office/powerpoint/2010/main" val="4254339168"/>
+      </p:ext>
+    </p:extLst>
+  </p:cSld>
+  <p:clrMapOvr>
+    <a:masterClrMapping/>
+  </p:clrMapOvr>
+</p:notes>
+</file>
+
+<file path=ppt/notesSlides/notesSlide18.xml><?xml version="1.0" encoding="utf-8"?>
+<p:notes xmlns:a="http://schemas.openxmlformats.org/drawingml/2006/main" xmlns:r="http://schemas.openxmlformats.org/officeDocument/2006/relationships" xmlns:p="http://schemas.openxmlformats.org/presentationml/2006/main">
+  <p:cSld>
+    <p:spTree>
+      <p:nvGrpSpPr>
+        <p:cNvPr id="1" name=""/>
+        <p:cNvGrpSpPr/>
+        <p:nvPr/>
+      </p:nvGrpSpPr>
+      <p:grpSpPr>
+        <a:xfrm>
+          <a:off x="0" y="0"/>
+          <a:ext cx="0" cy="0"/>
+          <a:chOff x="0" y="0"/>
+          <a:chExt cx="0" cy="0"/>
+        </a:xfrm>
+      </p:grpSpPr>
+      <p:sp>
+        <p:nvSpPr>
+          <p:cNvPr id="2" name="슬라이드 이미지 개체 틀 1"/>
+          <p:cNvSpPr>
+            <a:spLocks noGrp="1" noRot="1" noChangeAspect="1"/>
+          </p:cNvSpPr>
+          <p:nvPr>
+            <p:ph type="sldImg"/>
+          </p:nvPr>
+        </p:nvSpPr>
+        <p:spPr/>
+      </p:sp>
+      <p:sp>
+        <p:nvSpPr>
+          <p:cNvPr id="3" name="슬라이드 노트 개체 틀 2"/>
+          <p:cNvSpPr>
+            <a:spLocks noGrp="1"/>
+          </p:cNvSpPr>
+          <p:nvPr>
+            <p:ph type="body" idx="1"/>
+          </p:nvPr>
+        </p:nvSpPr>
+        <p:spPr/>
+        <p:txBody>
+          <a:bodyPr/>
+          <a:lstStyle/>
+          <a:p>
+            <a:r>
+              <a:rPr lang="ko-KR" altLang="en-US" dirty="0"/>
+              <a:t>“</a:t>
+            </a:r>
+            <a:r>
+              <a:rPr lang="ko-KR" altLang="en-US" dirty="0" err="1"/>
+              <a:t>경사하강법은</a:t>
+            </a:r>
+            <a:br>
+              <a:rPr lang="ko-KR" altLang="en-US" dirty="0"/>
+            </a:br>
+            <a:r>
+              <a:rPr lang="ko-KR" altLang="en-US" dirty="0"/>
+              <a:t>‘어디로 얼마나 </a:t>
+            </a:r>
+            <a:r>
+              <a:rPr lang="ko-KR" altLang="en-US" dirty="0" err="1"/>
+              <a:t>고칠지’를</a:t>
+            </a:r>
+            <a:r>
+              <a:rPr lang="ko-KR" altLang="en-US" dirty="0"/>
+              <a:t> 정하는 규칙입니다</a:t>
+            </a:r>
+            <a:r>
+              <a:rPr lang="en-US" altLang="ko-KR" dirty="0"/>
+              <a:t>.”</a:t>
+            </a:r>
+          </a:p>
+          <a:p>
+            <a:endParaRPr lang="en-US" altLang="ko-KR" dirty="0"/>
+          </a:p>
+          <a:p>
+            <a:r>
+              <a:rPr lang="ko-KR" altLang="en-US" dirty="0"/>
+              <a:t>“지금까지 우리는</a:t>
+            </a:r>
+            <a:br>
+              <a:rPr lang="ko-KR" altLang="en-US" dirty="0"/>
+            </a:br>
+            <a:r>
+              <a:rPr lang="ko-KR" altLang="en-US" dirty="0"/>
+              <a:t>모델이 무엇인지</a:t>
+            </a:r>
+            <a:r>
+              <a:rPr lang="en-US" altLang="ko-KR" dirty="0"/>
+              <a:t>,</a:t>
+            </a:r>
+            <a:br>
+              <a:rPr lang="en-US" altLang="ko-KR" dirty="0"/>
+            </a:br>
+            <a:r>
+              <a:rPr lang="ko-KR" altLang="en-US" dirty="0"/>
+              <a:t>학습이 무엇인지 개념적으로 봤습니다</a:t>
+            </a:r>
+            <a:r>
+              <a:rPr lang="en-US" altLang="ko-KR" dirty="0"/>
+              <a:t>.</a:t>
+            </a:r>
+          </a:p>
+          <a:p>
+            <a:r>
+              <a:rPr lang="ko-KR" altLang="en-US" dirty="0"/>
+              <a:t>이제부터는</a:t>
+            </a:r>
+            <a:br>
+              <a:rPr lang="ko-KR" altLang="en-US" dirty="0"/>
+            </a:br>
+            <a:r>
+              <a:rPr lang="ko-KR" altLang="en-US" dirty="0"/>
+              <a:t>가장 단순한 모델인 </a:t>
+            </a:r>
+            <a:r>
+              <a:rPr lang="ko-KR" altLang="en-US" b="1" dirty="0"/>
+              <a:t>회귀</a:t>
+            </a:r>
+            <a:r>
+              <a:rPr lang="ko-KR" altLang="en-US" dirty="0"/>
+              <a:t>를 통해</a:t>
+            </a:r>
+            <a:br>
+              <a:rPr lang="ko-KR" altLang="en-US" dirty="0"/>
+            </a:br>
+            <a:r>
+              <a:rPr lang="ko-KR" altLang="en-US" dirty="0"/>
+              <a:t>‘모델이 실제로 어떻게 </a:t>
+            </a:r>
+            <a:r>
+              <a:rPr lang="ko-KR" altLang="en-US" dirty="0" err="1"/>
+              <a:t>학습되는지’를</a:t>
+            </a:r>
+            <a:br>
+              <a:rPr lang="ko-KR" altLang="en-US" dirty="0"/>
+            </a:br>
+            <a:r>
+              <a:rPr lang="ko-KR" altLang="en-US" dirty="0"/>
+              <a:t>하나씩 뜯어보겠습니다</a:t>
+            </a:r>
+            <a:r>
+              <a:rPr lang="en-US" altLang="ko-KR" dirty="0"/>
+              <a:t>.</a:t>
+            </a:r>
+          </a:p>
+          <a:p>
+            <a:r>
+              <a:rPr lang="ko-KR" altLang="en-US" dirty="0"/>
+              <a:t>그 핵심 규칙이</a:t>
+            </a:r>
+            <a:br>
+              <a:rPr lang="ko-KR" altLang="en-US" dirty="0"/>
+            </a:br>
+            <a:r>
+              <a:rPr lang="ko-KR" altLang="en-US" dirty="0"/>
+              <a:t>바로 </a:t>
+            </a:r>
+            <a:r>
+              <a:rPr lang="ko-KR" altLang="en-US" b="1" dirty="0" err="1"/>
+              <a:t>경사하강법</a:t>
+            </a:r>
+            <a:r>
+              <a:rPr lang="ko-KR" altLang="en-US" dirty="0" err="1"/>
+              <a:t>입니다</a:t>
+            </a:r>
+            <a:r>
+              <a:rPr lang="en-US" altLang="ko-KR" dirty="0"/>
+              <a:t>.”</a:t>
+            </a:r>
+          </a:p>
+          <a:p>
+            <a:endParaRPr lang="ko-KR" altLang="en-US" dirty="0"/>
+          </a:p>
+        </p:txBody>
+      </p:sp>
+      <p:sp>
+        <p:nvSpPr>
+          <p:cNvPr id="4" name="슬라이드 번호 개체 틀 3"/>
+          <p:cNvSpPr>
+            <a:spLocks noGrp="1"/>
+          </p:cNvSpPr>
+          <p:nvPr>
+            <p:ph type="sldNum" sz="quarter" idx="5"/>
+          </p:nvPr>
+        </p:nvSpPr>
+        <p:spPr/>
+        <p:txBody>
+          <a:bodyPr/>
+          <a:lstStyle/>
+          <a:p>
+            <a:fld id="{3E35EA20-6519-4513-9EDC-C89C5369BAEC}" type="slidenum">
+              <a:rPr lang="ko-KR" altLang="en-US" smtClean="0"/>
+              <a:pPr/>
+              <a:t>41</a:t>
+            </a:fld>
+            <a:endParaRPr lang="ko-KR" altLang="en-US" dirty="0"/>
+          </a:p>
+        </p:txBody>
+      </p:sp>
+    </p:spTree>
+    <p:extLst>
+      <p:ext uri="{BB962C8B-B14F-4D97-AF65-F5344CB8AC3E}">
+        <p14:creationId xmlns:p14="http://schemas.microsoft.com/office/powerpoint/2010/main" val="2246056440"/>
+      </p:ext>
+    </p:extLst>
+  </p:cSld>
+  <p:clrMapOvr>
+    <a:masterClrMapping/>
+  </p:clrMapOvr>
+</p:notes>
+</file>
+
+<file path=ppt/notesSlides/notesSlide19.xml><?xml version="1.0" encoding="utf-8"?>
 <p:notes xmlns:a="http://schemas.openxmlformats.org/drawingml/2006/main" xmlns:r="http://schemas.openxmlformats.org/officeDocument/2006/relationships" xmlns:p="http://schemas.openxmlformats.org/presentationml/2006/main">
   <p:cSld>
     <p:spTree>
@@ -913,7 +1816,7 @@
           <a:p>
             <a:fld id="{A0085365-8376-4996-BDD6-F39608FADAF3}" type="slidenum">
               <a:rPr lang="ko-KR" altLang="en-US" smtClean="0"/>
-              <a:t>40</a:t>
+              <a:t>42</a:t>
             </a:fld>
             <a:endParaRPr lang="ko-KR" altLang="en-US"/>
           </a:p>
@@ -998,7 +1901,7 @@
             <a:fld id="{3E35EA20-6519-4513-9EDC-C89C5369BAEC}" type="slidenum">
               <a:rPr lang="ko-KR" altLang="en-US" smtClean="0"/>
               <a:pPr/>
-              <a:t>12</a:t>
+              <a:t>2</a:t>
             </a:fld>
             <a:endParaRPr lang="ko-KR" altLang="en-US" dirty="0"/>
           </a:p>
@@ -1007,7 +1910,7 @@
     </p:spTree>
     <p:extLst>
       <p:ext uri="{BB962C8B-B14F-4D97-AF65-F5344CB8AC3E}">
-        <p14:creationId xmlns:p14="http://schemas.microsoft.com/office/powerpoint/2010/main" val="1148760330"/>
+        <p14:creationId xmlns:p14="http://schemas.microsoft.com/office/powerpoint/2010/main" val="2959887629"/>
       </p:ext>
     </p:extLst>
   </p:cSld>
@@ -1022,13 +1925,7 @@
   <p:cSld>
     <p:spTree>
       <p:nvGrpSpPr>
-        <p:cNvPr id="1" name="">
-          <a:extLst>
-            <a:ext uri="{FF2B5EF4-FFF2-40B4-BE49-F238E27FC236}">
-              <a16:creationId xmlns:a16="http://schemas.microsoft.com/office/drawing/2014/main" id="{5C9B9FFD-805C-C2DC-6E5E-E881553E5EE1}"/>
-            </a:ext>
-          </a:extLst>
-        </p:cNvPr>
+        <p:cNvPr id="1" name=""/>
         <p:cNvGrpSpPr/>
         <p:nvPr/>
       </p:nvGrpSpPr>
@@ -1042,13 +1939,7 @@
       </p:grpSpPr>
       <p:sp>
         <p:nvSpPr>
-          <p:cNvPr id="2" name="슬라이드 이미지 개체 틀 1">
-            <a:extLst>
-              <a:ext uri="{FF2B5EF4-FFF2-40B4-BE49-F238E27FC236}">
-                <a16:creationId xmlns:a16="http://schemas.microsoft.com/office/drawing/2014/main" id="{ED5F2353-2CDA-2FC0-E138-D57668A8F25C}"/>
-              </a:ext>
-            </a:extLst>
-          </p:cNvPr>
+          <p:cNvPr id="2" name="슬라이드 이미지 개체 틀 1"/>
           <p:cNvSpPr>
             <a:spLocks noGrp="1" noRot="1" noChangeAspect="1"/>
           </p:cNvSpPr>
@@ -1060,13 +1951,7 @@
       </p:sp>
       <p:sp>
         <p:nvSpPr>
-          <p:cNvPr id="3" name="슬라이드 노트 개체 틀 2">
-            <a:extLst>
-              <a:ext uri="{FF2B5EF4-FFF2-40B4-BE49-F238E27FC236}">
-                <a16:creationId xmlns:a16="http://schemas.microsoft.com/office/drawing/2014/main" id="{B9F7D160-47CB-FC22-0A08-09C9796662B3}"/>
-              </a:ext>
-            </a:extLst>
-          </p:cNvPr>
+          <p:cNvPr id="3" name="슬라이드 노트 개체 틀 2"/>
           <p:cNvSpPr>
             <a:spLocks noGrp="1"/>
           </p:cNvSpPr>
@@ -1079,19 +1964,92 @@
           <a:bodyPr/>
           <a:lstStyle/>
           <a:p>
+            <a:r>
+              <a:rPr lang="ko-KR" altLang="en-US" dirty="0"/>
+              <a:t>“</a:t>
+            </a:r>
+            <a:r>
+              <a:rPr lang="ko-KR" altLang="en-US" dirty="0" err="1"/>
+              <a:t>머신러닝은</a:t>
+            </a:r>
+            <a:br>
+              <a:rPr lang="ko-KR" altLang="en-US" dirty="0"/>
+            </a:br>
+            <a:r>
+              <a:rPr lang="ko-KR" altLang="en-US" dirty="0"/>
+              <a:t>컴퓨터에게 규칙을 하나하나 알려주는 게 아니라</a:t>
+            </a:r>
+            <a:r>
+              <a:rPr lang="en-US" altLang="ko-KR" dirty="0"/>
+              <a:t>,</a:t>
+            </a:r>
+            <a:br>
+              <a:rPr lang="en-US" altLang="ko-KR" dirty="0"/>
+            </a:br>
+            <a:r>
+              <a:rPr lang="ko-KR" altLang="en-US" b="1" dirty="0"/>
+              <a:t>데이터로부터 규칙을 스스로 찾게 하는 방법</a:t>
+            </a:r>
+            <a:r>
+              <a:rPr lang="ko-KR" altLang="en-US" dirty="0"/>
+              <a:t>입니다</a:t>
+            </a:r>
+            <a:r>
+              <a:rPr lang="en-US" altLang="ko-KR" dirty="0"/>
+              <a:t>.”</a:t>
+            </a:r>
+          </a:p>
+          <a:p>
+            <a:r>
+              <a:rPr lang="en-US" altLang="ko-KR" dirty="0"/>
+              <a:t>“</a:t>
+            </a:r>
+            <a:r>
+              <a:rPr lang="ko-KR" altLang="en-US" dirty="0"/>
+              <a:t>앞에서 시계열 분석에서</a:t>
+            </a:r>
+            <a:br>
+              <a:rPr lang="ko-KR" altLang="en-US" dirty="0"/>
+            </a:br>
+            <a:r>
+              <a:rPr lang="ko-KR" altLang="en-US" dirty="0"/>
+              <a:t>데이터를 어떻게 다뤄야 하는지 배웠죠</a:t>
+            </a:r>
+            <a:r>
+              <a:rPr lang="en-US" altLang="ko-KR" dirty="0"/>
+              <a:t>.</a:t>
+            </a:r>
+            <a:br>
+              <a:rPr lang="en-US" altLang="ko-KR" dirty="0"/>
+            </a:br>
+            <a:r>
+              <a:rPr lang="ko-KR" altLang="en-US" dirty="0"/>
+              <a:t>이제는 그 데이터를 가지고</a:t>
+            </a:r>
+            <a:br>
+              <a:rPr lang="ko-KR" altLang="en-US" dirty="0"/>
+            </a:br>
+            <a:r>
+              <a:rPr lang="ko-KR" altLang="en-US" b="1" dirty="0"/>
+              <a:t>어떻게 규칙을 학습시키는지</a:t>
+            </a:r>
+            <a:r>
+              <a:rPr lang="ko-KR" altLang="en-US" dirty="0"/>
+              <a:t>를 보겠습니다</a:t>
+            </a:r>
+            <a:r>
+              <a:rPr lang="en-US" altLang="ko-KR" dirty="0"/>
+              <a:t>.”</a:t>
+            </a:r>
+          </a:p>
+          <a:p>
             <a:endParaRPr lang="ko-KR" altLang="en-US" dirty="0"/>
           </a:p>
         </p:txBody>
       </p:sp>
       <p:sp>
         <p:nvSpPr>
-          <p:cNvPr id="4" name="슬라이드 번호 개체 틀 3">
-            <a:extLst>
-              <a:ext uri="{FF2B5EF4-FFF2-40B4-BE49-F238E27FC236}">
-                <a16:creationId xmlns:a16="http://schemas.microsoft.com/office/drawing/2014/main" id="{54488046-FD32-5194-52B5-E1EF32385F67}"/>
-              </a:ext>
-            </a:extLst>
-          </p:cNvPr>
+          <p:cNvPr id="4" name="슬라이드 번호 개체 틀 3"/>
           <p:cNvSpPr>
             <a:spLocks noGrp="1"/>
           </p:cNvSpPr>
@@ -1107,7 +2065,7 @@
             <a:fld id="{3E35EA20-6519-4513-9EDC-C89C5369BAEC}" type="slidenum">
               <a:rPr lang="ko-KR" altLang="en-US" smtClean="0"/>
               <a:pPr/>
-              <a:t>13</a:t>
+              <a:t>3</a:t>
             </a:fld>
             <a:endParaRPr lang="ko-KR" altLang="en-US" dirty="0"/>
           </a:p>
@@ -1116,7 +2074,7 @@
     </p:spTree>
     <p:extLst>
       <p:ext uri="{BB962C8B-B14F-4D97-AF65-F5344CB8AC3E}">
-        <p14:creationId xmlns:p14="http://schemas.microsoft.com/office/powerpoint/2010/main" val="2292438165"/>
+        <p14:creationId xmlns:p14="http://schemas.microsoft.com/office/powerpoint/2010/main" val="1990028106"/>
       </p:ext>
     </p:extLst>
   </p:cSld>
@@ -1170,6 +2128,87 @@
           <a:bodyPr/>
           <a:lstStyle/>
           <a:p>
+            <a:r>
+              <a:rPr lang="ko-KR" altLang="en-US" dirty="0"/>
+              <a:t>데이터</a:t>
+            </a:r>
+            <a:r>
+              <a:rPr lang="en-US" altLang="ko-KR" dirty="0"/>
+              <a:t>: </a:t>
+            </a:r>
+            <a:r>
+              <a:rPr lang="ko-KR" altLang="en-US" dirty="0"/>
+              <a:t>우리가 가진 정보</a:t>
+            </a:r>
+          </a:p>
+          <a:p>
+            <a:r>
+              <a:rPr lang="ko-KR" altLang="en-US" dirty="0"/>
+              <a:t>모델</a:t>
+            </a:r>
+            <a:r>
+              <a:rPr lang="en-US" altLang="ko-KR" dirty="0"/>
+              <a:t>: </a:t>
+            </a:r>
+            <a:r>
+              <a:rPr lang="ko-KR" altLang="en-US" dirty="0"/>
+              <a:t>관계를 표현하는 틀</a:t>
+            </a:r>
+          </a:p>
+          <a:p>
+            <a:r>
+              <a:rPr lang="ko-KR" altLang="en-US" dirty="0"/>
+              <a:t>학습</a:t>
+            </a:r>
+            <a:r>
+              <a:rPr lang="en-US" altLang="ko-KR" dirty="0"/>
+              <a:t>: </a:t>
+            </a:r>
+            <a:r>
+              <a:rPr lang="ko-KR" altLang="en-US" dirty="0"/>
+              <a:t>모델이 데이터를 보고 조정되는 과정</a:t>
+            </a:r>
+          </a:p>
+          <a:p>
+            <a:r>
+              <a:rPr lang="ko-KR" altLang="en-US" dirty="0"/>
+              <a:t>평가</a:t>
+            </a:r>
+            <a:r>
+              <a:rPr lang="en-US" altLang="ko-KR" dirty="0"/>
+              <a:t>: </a:t>
+            </a:r>
+            <a:r>
+              <a:rPr lang="ko-KR" altLang="en-US" dirty="0"/>
+              <a:t>그 결과를 확인하는 단계</a:t>
+            </a:r>
+          </a:p>
+          <a:p>
+            <a:r>
+              <a:rPr lang="ko-KR" altLang="en-US" dirty="0"/>
+              <a:t>“앞에서 배운 시계열 규칙은</a:t>
+            </a:r>
+            <a:br>
+              <a:rPr lang="ko-KR" altLang="en-US" dirty="0"/>
+            </a:br>
+            <a:r>
+              <a:rPr lang="ko-KR" altLang="en-US" dirty="0"/>
+              <a:t>이 중 </a:t>
+            </a:r>
+            <a:r>
+              <a:rPr lang="ko-KR" altLang="en-US" b="1" dirty="0"/>
+              <a:t>데이터와 평가 단계에 계속 적용됩니다</a:t>
+            </a:r>
+            <a:r>
+              <a:rPr lang="en-US" altLang="ko-KR" b="1" dirty="0"/>
+              <a:t>.</a:t>
+            </a:r>
+            <a:r>
+              <a:rPr lang="ko-KR" altLang="en-US" dirty="0"/>
+              <a:t>”</a:t>
+            </a:r>
+          </a:p>
+          <a:p>
             <a:endParaRPr lang="ko-KR" altLang="en-US" dirty="0"/>
           </a:p>
         </p:txBody>
@@ -1192,7 +2231,7 @@
             <a:fld id="{3E35EA20-6519-4513-9EDC-C89C5369BAEC}" type="slidenum">
               <a:rPr lang="ko-KR" altLang="en-US" smtClean="0"/>
               <a:pPr/>
-              <a:t>15</a:t>
+              <a:t>4</a:t>
             </a:fld>
             <a:endParaRPr lang="ko-KR" altLang="en-US" dirty="0"/>
           </a:p>
@@ -1201,7 +2240,7 @@
     </p:spTree>
     <p:extLst>
       <p:ext uri="{BB962C8B-B14F-4D97-AF65-F5344CB8AC3E}">
-        <p14:creationId xmlns:p14="http://schemas.microsoft.com/office/powerpoint/2010/main" val="433451128"/>
+        <p14:creationId xmlns:p14="http://schemas.microsoft.com/office/powerpoint/2010/main" val="4146777212"/>
       </p:ext>
     </p:extLst>
   </p:cSld>
@@ -1255,6 +2294,73 @@
           <a:bodyPr/>
           <a:lstStyle/>
           <a:p>
+            <a:r>
+              <a:rPr lang="ko-KR" altLang="en-US" dirty="0"/>
+              <a:t>“</a:t>
+            </a:r>
+            <a:r>
+              <a:rPr lang="ko-KR" altLang="en-US" dirty="0" err="1"/>
+              <a:t>머신러닝은</a:t>
+            </a:r>
+            <a:br>
+              <a:rPr lang="ko-KR" altLang="en-US" dirty="0"/>
+            </a:br>
+            <a:r>
+              <a:rPr lang="ko-KR" altLang="en-US" dirty="0"/>
+              <a:t>한 번에 끝나는 작업이 아닙니다</a:t>
+            </a:r>
+            <a:r>
+              <a:rPr lang="en-US" altLang="ko-KR" dirty="0"/>
+              <a:t>.”</a:t>
+            </a:r>
+          </a:p>
+          <a:p>
+            <a:r>
+              <a:rPr lang="en-US" altLang="ko-KR" dirty="0"/>
+              <a:t>“</a:t>
+            </a:r>
+            <a:r>
+              <a:rPr lang="ko-KR" altLang="en-US" dirty="0"/>
+              <a:t>학습 → 평가 → 수정 → 다시 학습</a:t>
+            </a:r>
+            <a:br>
+              <a:rPr lang="ko-KR" altLang="en-US" dirty="0"/>
+            </a:br>
+            <a:r>
+              <a:rPr lang="ko-KR" altLang="en-US" dirty="0"/>
+              <a:t>이 과정을 반복합니다</a:t>
+            </a:r>
+            <a:r>
+              <a:rPr lang="en-US" altLang="ko-KR" dirty="0"/>
+              <a:t>.”</a:t>
+            </a:r>
+          </a:p>
+          <a:p>
+            <a:r>
+              <a:rPr lang="en-US" altLang="ko-KR" dirty="0"/>
+              <a:t>“</a:t>
+            </a:r>
+            <a:r>
+              <a:rPr lang="ko-KR" altLang="en-US" dirty="0"/>
+              <a:t>그래서 성능이 한 번에 잘 안 나와도</a:t>
+            </a:r>
+            <a:br>
+              <a:rPr lang="ko-KR" altLang="en-US" dirty="0"/>
+            </a:br>
+            <a:r>
+              <a:rPr lang="ko-KR" altLang="en-US" b="1" dirty="0"/>
+              <a:t>이상한 게 아닙니다</a:t>
+            </a:r>
+            <a:r>
+              <a:rPr lang="en-US" altLang="ko-KR" b="1" dirty="0"/>
+              <a:t>.</a:t>
+            </a:r>
+            <a:r>
+              <a:rPr lang="ko-KR" altLang="en-US" dirty="0"/>
+              <a:t>”</a:t>
+            </a:r>
+          </a:p>
+          <a:p>
             <a:endParaRPr lang="ko-KR" altLang="en-US" dirty="0"/>
           </a:p>
         </p:txBody>
@@ -1277,7 +2383,7 @@
             <a:fld id="{3E35EA20-6519-4513-9EDC-C89C5369BAEC}" type="slidenum">
               <a:rPr lang="ko-KR" altLang="en-US" smtClean="0"/>
               <a:pPr/>
-              <a:t>16</a:t>
+              <a:t>9</a:t>
             </a:fld>
             <a:endParaRPr lang="ko-KR" altLang="en-US" dirty="0"/>
           </a:p>
@@ -1286,7 +2392,7 @@
     </p:spTree>
     <p:extLst>
       <p:ext uri="{BB962C8B-B14F-4D97-AF65-F5344CB8AC3E}">
-        <p14:creationId xmlns:p14="http://schemas.microsoft.com/office/powerpoint/2010/main" val="510183424"/>
+        <p14:creationId xmlns:p14="http://schemas.microsoft.com/office/powerpoint/2010/main" val="2330264160"/>
       </p:ext>
     </p:extLst>
   </p:cSld>
@@ -1362,7 +2468,7 @@
             <a:fld id="{3E35EA20-6519-4513-9EDC-C89C5369BAEC}" type="slidenum">
               <a:rPr lang="ko-KR" altLang="en-US" smtClean="0"/>
               <a:pPr/>
-              <a:t>17</a:t>
+              <a:t>12</a:t>
             </a:fld>
             <a:endParaRPr lang="ko-KR" altLang="en-US" dirty="0"/>
           </a:p>
@@ -1371,7 +2477,7 @@
     </p:spTree>
     <p:extLst>
       <p:ext uri="{BB962C8B-B14F-4D97-AF65-F5344CB8AC3E}">
-        <p14:creationId xmlns:p14="http://schemas.microsoft.com/office/powerpoint/2010/main" val="2131754256"/>
+        <p14:creationId xmlns:p14="http://schemas.microsoft.com/office/powerpoint/2010/main" val="1148760330"/>
       </p:ext>
     </p:extLst>
   </p:cSld>
@@ -1386,7 +2492,13 @@
   <p:cSld>
     <p:spTree>
       <p:nvGrpSpPr>
-        <p:cNvPr id="1" name=""/>
+        <p:cNvPr id="1" name="">
+          <a:extLst>
+            <a:ext uri="{FF2B5EF4-FFF2-40B4-BE49-F238E27FC236}">
+              <a16:creationId xmlns:a16="http://schemas.microsoft.com/office/drawing/2014/main" id="{5C9B9FFD-805C-C2DC-6E5E-E881553E5EE1}"/>
+            </a:ext>
+          </a:extLst>
+        </p:cNvPr>
         <p:cNvGrpSpPr/>
         <p:nvPr/>
       </p:nvGrpSpPr>
@@ -1400,7 +2512,13 @@
       </p:grpSpPr>
       <p:sp>
         <p:nvSpPr>
-          <p:cNvPr id="2" name="슬라이드 이미지 개체 틀 1"/>
+          <p:cNvPr id="2" name="슬라이드 이미지 개체 틀 1">
+            <a:extLst>
+              <a:ext uri="{FF2B5EF4-FFF2-40B4-BE49-F238E27FC236}">
+                <a16:creationId xmlns:a16="http://schemas.microsoft.com/office/drawing/2014/main" id="{ED5F2353-2CDA-2FC0-E138-D57668A8F25C}"/>
+              </a:ext>
+            </a:extLst>
+          </p:cNvPr>
           <p:cNvSpPr>
             <a:spLocks noGrp="1" noRot="1" noChangeAspect="1"/>
           </p:cNvSpPr>
@@ -1412,7 +2530,13 @@
       </p:sp>
       <p:sp>
         <p:nvSpPr>
-          <p:cNvPr id="3" name="슬라이드 노트 개체 틀 2"/>
+          <p:cNvPr id="3" name="슬라이드 노트 개체 틀 2">
+            <a:extLst>
+              <a:ext uri="{FF2B5EF4-FFF2-40B4-BE49-F238E27FC236}">
+                <a16:creationId xmlns:a16="http://schemas.microsoft.com/office/drawing/2014/main" id="{B9F7D160-47CB-FC22-0A08-09C9796662B3}"/>
+              </a:ext>
+            </a:extLst>
+          </p:cNvPr>
           <p:cNvSpPr>
             <a:spLocks noGrp="1"/>
           </p:cNvSpPr>
@@ -1425,37 +2549,69 @@
           <a:bodyPr/>
           <a:lstStyle/>
           <a:p>
+            <a:r>
+              <a:rPr lang="ko-KR" altLang="en-US" dirty="0"/>
+              <a:t>이 과정은</a:t>
+            </a:r>
+            <a:br>
+              <a:rPr lang="ko-KR" altLang="en-US" dirty="0"/>
+            </a:br>
+            <a:r>
+              <a:rPr lang="ko-KR" altLang="en-US" dirty="0"/>
+              <a:t>이후 </a:t>
+            </a:r>
+            <a:r>
+              <a:rPr lang="ko-KR" altLang="en-US" dirty="0" err="1"/>
+              <a:t>머신러닝</a:t>
+            </a:r>
+            <a:r>
+              <a:rPr lang="ko-KR" altLang="en-US" dirty="0"/>
+              <a:t> 프로젝트에서</a:t>
+            </a:r>
+            <a:br>
+              <a:rPr lang="ko-KR" altLang="en-US" dirty="0"/>
+            </a:br>
+            <a:r>
+              <a:rPr lang="ko-KR" altLang="en-US" dirty="0"/>
+              <a:t>실제로 경험하게 됨</a:t>
+            </a:r>
+          </a:p>
+        </p:txBody>
+      </p:sp>
+      <p:sp>
+        <p:nvSpPr>
+          <p:cNvPr id="4" name="슬라이드 번호 개체 틀 3">
+            <a:extLst>
+              <a:ext uri="{FF2B5EF4-FFF2-40B4-BE49-F238E27FC236}">
+                <a16:creationId xmlns:a16="http://schemas.microsoft.com/office/drawing/2014/main" id="{54488046-FD32-5194-52B5-E1EF32385F67}"/>
+              </a:ext>
+            </a:extLst>
+          </p:cNvPr>
+          <p:cNvSpPr>
+            <a:spLocks noGrp="1"/>
+          </p:cNvSpPr>
+          <p:nvPr>
+            <p:ph type="sldNum" sz="quarter" idx="5"/>
+          </p:nvPr>
+        </p:nvSpPr>
+        <p:spPr/>
+        <p:txBody>
+          <a:bodyPr/>
+          <a:lstStyle/>
+          <a:p>
+            <a:fld id="{3E35EA20-6519-4513-9EDC-C89C5369BAEC}" type="slidenum">
+              <a:rPr lang="ko-KR" altLang="en-US" smtClean="0"/>
+              <a:pPr/>
+              <a:t>13</a:t>
+            </a:fld>
             <a:endParaRPr lang="ko-KR" altLang="en-US" dirty="0"/>
-          </a:p>
-        </p:txBody>
-      </p:sp>
-      <p:sp>
-        <p:nvSpPr>
-          <p:cNvPr id="4" name="슬라이드 번호 개체 틀 3"/>
-          <p:cNvSpPr>
-            <a:spLocks noGrp="1"/>
-          </p:cNvSpPr>
-          <p:nvPr>
-            <p:ph type="sldNum" sz="quarter" idx="10"/>
-          </p:nvPr>
-        </p:nvSpPr>
-        <p:spPr/>
-        <p:txBody>
-          <a:bodyPr/>
-          <a:lstStyle/>
-          <a:p>
-            <a:fld id="{C09E5BFC-1559-42F1-8940-AB342D56BF02}" type="slidenum">
-              <a:rPr lang="ko-KR" altLang="en-US" smtClean="0"/>
-              <a:t>18</a:t>
-            </a:fld>
-            <a:endParaRPr lang="ko-KR" altLang="en-US"/>
           </a:p>
         </p:txBody>
       </p:sp>
     </p:spTree>
     <p:extLst>
       <p:ext uri="{BB962C8B-B14F-4D97-AF65-F5344CB8AC3E}">
-        <p14:creationId xmlns:p14="http://schemas.microsoft.com/office/powerpoint/2010/main" val="816646178"/>
+        <p14:creationId xmlns:p14="http://schemas.microsoft.com/office/powerpoint/2010/main" val="2292438165"/>
       </p:ext>
     </p:extLst>
   </p:cSld>
@@ -1528,18 +2684,19 @@
           <a:bodyPr/>
           <a:lstStyle/>
           <a:p>
-            <a:fld id="{C09E5BFC-1559-42F1-8940-AB342D56BF02}" type="slidenum">
+            <a:fld id="{3E35EA20-6519-4513-9EDC-C89C5369BAEC}" type="slidenum">
               <a:rPr lang="ko-KR" altLang="en-US" smtClean="0"/>
-              <a:t>21</a:t>
+              <a:pPr/>
+              <a:t>15</a:t>
             </a:fld>
-            <a:endParaRPr lang="ko-KR" altLang="en-US"/>
+            <a:endParaRPr lang="ko-KR" altLang="en-US" dirty="0"/>
           </a:p>
         </p:txBody>
       </p:sp>
     </p:spTree>
     <p:extLst>
       <p:ext uri="{BB962C8B-B14F-4D97-AF65-F5344CB8AC3E}">
-        <p14:creationId xmlns:p14="http://schemas.microsoft.com/office/powerpoint/2010/main" val="3158770369"/>
+        <p14:creationId xmlns:p14="http://schemas.microsoft.com/office/powerpoint/2010/main" val="433451128"/>
       </p:ext>
     </p:extLst>
   </p:cSld>
@@ -1612,18 +2769,19 @@
           <a:bodyPr/>
           <a:lstStyle/>
           <a:p>
-            <a:fld id="{C09E5BFC-1559-42F1-8940-AB342D56BF02}" type="slidenum">
+            <a:fld id="{3E35EA20-6519-4513-9EDC-C89C5369BAEC}" type="slidenum">
               <a:rPr lang="ko-KR" altLang="en-US" smtClean="0"/>
-              <a:t>22</a:t>
+              <a:pPr/>
+              <a:t>16</a:t>
             </a:fld>
-            <a:endParaRPr lang="ko-KR" altLang="en-US"/>
+            <a:endParaRPr lang="ko-KR" altLang="en-US" dirty="0"/>
           </a:p>
         </p:txBody>
       </p:sp>
     </p:spTree>
     <p:extLst>
       <p:ext uri="{BB962C8B-B14F-4D97-AF65-F5344CB8AC3E}">
-        <p14:creationId xmlns:p14="http://schemas.microsoft.com/office/powerpoint/2010/main" val="3158770369"/>
+        <p14:creationId xmlns:p14="http://schemas.microsoft.com/office/powerpoint/2010/main" val="510183424"/>
       </p:ext>
     </p:extLst>
   </p:cSld>
@@ -1780,7 +2938,7 @@
           <a:p>
             <a:fld id="{442BEE3F-2E9A-4FD8-8B8A-8619F3E161C0}" type="datetime1">
               <a:rPr lang="ko-KR" altLang="en-US" smtClean="0"/>
-              <a:t>2025-09-17</a:t>
+              <a:t>2026-02-10</a:t>
             </a:fld>
             <a:endParaRPr lang="ko-KR" altLang="en-US"/>
           </a:p>
@@ -2067,7 +3225,7 @@
           <a:p>
             <a:fld id="{0F78D9C4-20C1-4B15-A116-16DC77AD9A1E}" type="datetime1">
               <a:rPr lang="ko-KR" altLang="en-US" smtClean="0"/>
-              <a:t>2025-09-17</a:t>
+              <a:t>2026-02-10</a:t>
             </a:fld>
             <a:endParaRPr lang="ko-KR" altLang="en-US"/>
           </a:p>
@@ -2242,7 +3400,7 @@
           <a:p>
             <a:fld id="{7F5E23C3-0E3D-4E4E-8486-D7FB4C073DC1}" type="datetime1">
               <a:rPr lang="ko-KR" altLang="en-US" smtClean="0"/>
-              <a:t>2025-09-17</a:t>
+              <a:t>2026-02-10</a:t>
             </a:fld>
             <a:endParaRPr lang="ko-KR" altLang="en-US"/>
           </a:p>
@@ -2571,7 +3729,7 @@
           <a:p>
             <a:fld id="{7F5E23C3-0E3D-4E4E-8486-D7FB4C073DC1}" type="datetime1">
               <a:rPr lang="ko-KR" altLang="en-US" smtClean="0"/>
-              <a:t>2025-09-17</a:t>
+              <a:t>2026-02-10</a:t>
             </a:fld>
             <a:endParaRPr lang="ko-KR" altLang="en-US"/>
           </a:p>
@@ -3093,105 +4251,6 @@
           </a:p>
         </p:txBody>
       </p:sp>
-      <p:sp>
-        <p:nvSpPr>
-          <p:cNvPr id="3" name="부제목 2">
-            <a:extLst>
-              <a:ext uri="{FF2B5EF4-FFF2-40B4-BE49-F238E27FC236}">
-                <a16:creationId xmlns:a16="http://schemas.microsoft.com/office/drawing/2014/main" id="{5F9E2036-8D3D-3C48-304C-6615D19E477C}"/>
-              </a:ext>
-            </a:extLst>
-          </p:cNvPr>
-          <p:cNvSpPr>
-            <a:spLocks noGrp="1"/>
-          </p:cNvSpPr>
-          <p:nvPr>
-            <p:ph type="subTitle" idx="1"/>
-          </p:nvPr>
-        </p:nvSpPr>
-        <p:spPr>
-          <a:xfrm>
-            <a:off x="6375349" y="3686684"/>
-            <a:ext cx="2336503" cy="530087"/>
-          </a:xfrm>
-        </p:spPr>
-        <p:txBody>
-          <a:bodyPr wrap="square"/>
-          <a:lstStyle/>
-          <a:p>
-            <a:pPr algn="just"/>
-            <a:r>
-              <a:rPr lang="ko-KR" altLang="en-US" b="1" dirty="0">
-                <a:solidFill>
-                  <a:srgbClr val="2B2B2B"/>
-                </a:solidFill>
-                <a:latin typeface="G마켓 산스 TTF Bold" panose="02000000000000000000" pitchFamily="2" charset="-127"/>
-                <a:ea typeface="G마켓 산스 TTF Bold" panose="02000000000000000000" pitchFamily="2" charset="-127"/>
-                <a:cs typeface="Pretendard SemiBold" panose="02000703000000020004" pitchFamily="2" charset="-127"/>
-              </a:rPr>
-              <a:t>재생에너지 </a:t>
-            </a:r>
-            <a:r>
-              <a:rPr lang="en-US" altLang="ko-KR" b="1" dirty="0">
-                <a:solidFill>
-                  <a:srgbClr val="2B2B2B"/>
-                </a:solidFill>
-                <a:latin typeface="G마켓 산스 TTF Bold" panose="02000000000000000000" pitchFamily="2" charset="-127"/>
-                <a:ea typeface="G마켓 산스 TTF Bold" panose="02000000000000000000" pitchFamily="2" charset="-127"/>
-                <a:cs typeface="Pretendard SemiBold" panose="02000703000000020004" pitchFamily="2" charset="-127"/>
-              </a:rPr>
-              <a:t>3</a:t>
-            </a:r>
-            <a:r>
-              <a:rPr lang="ko-KR" altLang="en-US" b="1" dirty="0">
-                <a:solidFill>
-                  <a:srgbClr val="2B2B2B"/>
-                </a:solidFill>
-                <a:latin typeface="G마켓 산스 TTF Bold" panose="02000000000000000000" pitchFamily="2" charset="-127"/>
-                <a:ea typeface="G마켓 산스 TTF Bold" panose="02000000000000000000" pitchFamily="2" charset="-127"/>
-                <a:cs typeface="Pretendard SemiBold" panose="02000703000000020004" pitchFamily="2" charset="-127"/>
-              </a:rPr>
-              <a:t>기</a:t>
-            </a:r>
-          </a:p>
-        </p:txBody>
-      </p:sp>
-      <p:pic>
-        <p:nvPicPr>
-          <p:cNvPr id="4" name="그림 3">
-            <a:extLst>
-              <a:ext uri="{FF2B5EF4-FFF2-40B4-BE49-F238E27FC236}">
-                <a16:creationId xmlns:a16="http://schemas.microsoft.com/office/drawing/2014/main" id="{73AD1B1D-CD7D-EE4E-41B0-87A1CCAAD46F}"/>
-              </a:ext>
-            </a:extLst>
-          </p:cNvPr>
-          <p:cNvPicPr>
-            <a:picLocks noChangeAspect="1"/>
-          </p:cNvPicPr>
-          <p:nvPr/>
-        </p:nvPicPr>
-        <p:blipFill>
-          <a:blip r:embed="rId3">
-            <a:extLst>
-              <a:ext uri="{28A0092B-C50C-407E-A947-70E740481C1C}">
-                <a14:useLocalDpi xmlns:a14="http://schemas.microsoft.com/office/drawing/2010/main" val="0"/>
-              </a:ext>
-            </a:extLst>
-          </a:blip>
-          <a:stretch>
-            <a:fillRect/>
-          </a:stretch>
-        </p:blipFill>
-        <p:spPr>
-          <a:xfrm>
-            <a:off x="3229511" y="3670957"/>
-            <a:ext cx="3021223" cy="456225"/>
-          </a:xfrm>
-          <a:prstGeom prst="rect">
-            <a:avLst/>
-          </a:prstGeom>
-        </p:spPr>
-      </p:pic>
       <p:grpSp>
         <p:nvGrpSpPr>
           <p:cNvPr id="5" name="그룹 4">
@@ -3227,7 +4286,7 @@
             <p:nvPr/>
           </p:nvPicPr>
           <p:blipFill>
-            <a:blip r:embed="rId4">
+            <a:blip r:embed="rId3">
               <a:extLst>
                 <a:ext uri="{28A0092B-C50C-407E-A947-70E740481C1C}">
                   <a14:useLocalDpi xmlns:a14="http://schemas.microsoft.com/office/drawing/2010/main" val="0"/>
@@ -3263,7 +4322,7 @@
             <p:nvPr/>
           </p:nvPicPr>
           <p:blipFill>
-            <a:blip r:embed="rId5" cstate="print">
+            <a:blip r:embed="rId4" cstate="print">
               <a:extLst>
                 <a:ext uri="{28A0092B-C50C-407E-A947-70E740481C1C}">
                   <a14:useLocalDpi xmlns:a14="http://schemas.microsoft.com/office/drawing/2010/main" val="0"/>
@@ -3285,10 +4344,275 @@
           </p:spPr>
         </p:pic>
       </p:grpSp>
+      <p:sp>
+        <p:nvSpPr>
+          <p:cNvPr id="8" name="부제목 2">
+            <a:extLst>
+              <a:ext uri="{FF2B5EF4-FFF2-40B4-BE49-F238E27FC236}">
+                <a16:creationId xmlns:a16="http://schemas.microsoft.com/office/drawing/2014/main" id="{DB4B2667-B3F4-F4E7-4A87-A3477312E2B1}"/>
+              </a:ext>
+            </a:extLst>
+          </p:cNvPr>
+          <p:cNvSpPr txBox="1">
+            <a:spLocks/>
+          </p:cNvSpPr>
+          <p:nvPr/>
+        </p:nvSpPr>
+        <p:spPr>
+          <a:xfrm>
+            <a:off x="5194406" y="3686684"/>
+            <a:ext cx="4316585" cy="530087"/>
+          </a:xfrm>
+          <a:prstGeom prst="rect">
+            <a:avLst/>
+          </a:prstGeom>
+        </p:spPr>
+        <p:txBody>
+          <a:bodyPr vert="horz" wrap="square" lIns="91440" tIns="45720" rIns="91440" bIns="45720" rtlCol="0">
+            <a:normAutofit fontScale="85000" lnSpcReduction="10000"/>
+          </a:bodyPr>
+          <a:lstStyle>
+            <a:lvl1pPr marL="0" indent="0" algn="ctr" defTabSz="914400" rtl="0" eaLnBrk="1" latinLnBrk="1" hangingPunct="1">
+              <a:lnSpc>
+                <a:spcPct val="90000"/>
+              </a:lnSpc>
+              <a:spcBef>
+                <a:spcPts val="1000"/>
+              </a:spcBef>
+              <a:buFont typeface="Arial" panose="020B0604020202020204" pitchFamily="34" charset="0"/>
+              <a:buNone/>
+              <a:defRPr sz="2400" kern="1200">
+                <a:solidFill>
+                  <a:schemeClr val="tx1"/>
+                </a:solidFill>
+                <a:latin typeface="Pretendard Medium" panose="02000603000000020004" pitchFamily="2" charset="-127"/>
+                <a:ea typeface="Pretendard Medium" panose="02000603000000020004" pitchFamily="2" charset="-127"/>
+                <a:cs typeface="Pretendard Medium" panose="02000603000000020004" pitchFamily="2" charset="-127"/>
+              </a:defRPr>
+            </a:lvl1pPr>
+            <a:lvl2pPr marL="457200" indent="0" algn="ctr" defTabSz="914400" rtl="0" eaLnBrk="1" latinLnBrk="1" hangingPunct="1">
+              <a:lnSpc>
+                <a:spcPct val="90000"/>
+              </a:lnSpc>
+              <a:spcBef>
+                <a:spcPts val="500"/>
+              </a:spcBef>
+              <a:buFont typeface="Arial" panose="020B0604020202020204" pitchFamily="34" charset="0"/>
+              <a:buNone/>
+              <a:defRPr sz="2000" kern="1200">
+                <a:solidFill>
+                  <a:schemeClr val="tx1"/>
+                </a:solidFill>
+                <a:latin typeface="Pretendard Light" panose="02000403000000020004" pitchFamily="2" charset="-127"/>
+                <a:ea typeface="Pretendard Light" panose="02000403000000020004" pitchFamily="2" charset="-127"/>
+                <a:cs typeface="Pretendard Light" panose="02000403000000020004" pitchFamily="2" charset="-127"/>
+              </a:defRPr>
+            </a:lvl2pPr>
+            <a:lvl3pPr marL="914400" indent="0" algn="ctr" defTabSz="914400" rtl="0" eaLnBrk="1" latinLnBrk="1" hangingPunct="1">
+              <a:lnSpc>
+                <a:spcPct val="90000"/>
+              </a:lnSpc>
+              <a:spcBef>
+                <a:spcPts val="500"/>
+              </a:spcBef>
+              <a:buFont typeface="Arial" panose="020B0604020202020204" pitchFamily="34" charset="0"/>
+              <a:buNone/>
+              <a:defRPr sz="1800" kern="1200">
+                <a:solidFill>
+                  <a:schemeClr val="tx1"/>
+                </a:solidFill>
+                <a:latin typeface="Pretendard Light" panose="02000403000000020004" pitchFamily="2" charset="-127"/>
+                <a:ea typeface="Pretendard Light" panose="02000403000000020004" pitchFamily="2" charset="-127"/>
+                <a:cs typeface="Pretendard Light" panose="02000403000000020004" pitchFamily="2" charset="-127"/>
+              </a:defRPr>
+            </a:lvl3pPr>
+            <a:lvl4pPr marL="1371600" indent="0" algn="ctr" defTabSz="914400" rtl="0" eaLnBrk="1" latinLnBrk="1" hangingPunct="1">
+              <a:lnSpc>
+                <a:spcPct val="90000"/>
+              </a:lnSpc>
+              <a:spcBef>
+                <a:spcPts val="500"/>
+              </a:spcBef>
+              <a:buFont typeface="Arial" panose="020B0604020202020204" pitchFamily="34" charset="0"/>
+              <a:buNone/>
+              <a:defRPr sz="1600" kern="1200">
+                <a:solidFill>
+                  <a:schemeClr val="tx1"/>
+                </a:solidFill>
+                <a:latin typeface="Pretendard Light" panose="02000403000000020004" pitchFamily="2" charset="-127"/>
+                <a:ea typeface="Pretendard Light" panose="02000403000000020004" pitchFamily="2" charset="-127"/>
+                <a:cs typeface="Pretendard Light" panose="02000403000000020004" pitchFamily="2" charset="-127"/>
+              </a:defRPr>
+            </a:lvl4pPr>
+            <a:lvl5pPr marL="1828800" indent="0" algn="ctr" defTabSz="914400" rtl="0" eaLnBrk="1" latinLnBrk="1" hangingPunct="1">
+              <a:lnSpc>
+                <a:spcPct val="90000"/>
+              </a:lnSpc>
+              <a:spcBef>
+                <a:spcPts val="500"/>
+              </a:spcBef>
+              <a:buFont typeface="Arial" panose="020B0604020202020204" pitchFamily="34" charset="0"/>
+              <a:buNone/>
+              <a:defRPr sz="1600" kern="1200">
+                <a:solidFill>
+                  <a:schemeClr val="tx1"/>
+                </a:solidFill>
+                <a:latin typeface="Pretendard Light" panose="02000403000000020004" pitchFamily="2" charset="-127"/>
+                <a:ea typeface="Pretendard Light" panose="02000403000000020004" pitchFamily="2" charset="-127"/>
+                <a:cs typeface="Pretendard Light" panose="02000403000000020004" pitchFamily="2" charset="-127"/>
+              </a:defRPr>
+            </a:lvl5pPr>
+            <a:lvl6pPr marL="2286000" indent="0" algn="ctr" defTabSz="914400" rtl="0" eaLnBrk="1" latinLnBrk="1" hangingPunct="1">
+              <a:lnSpc>
+                <a:spcPct val="90000"/>
+              </a:lnSpc>
+              <a:spcBef>
+                <a:spcPts val="500"/>
+              </a:spcBef>
+              <a:buFont typeface="Arial" panose="020B0604020202020204" pitchFamily="34" charset="0"/>
+              <a:buNone/>
+              <a:defRPr sz="1600" kern="1200">
+                <a:solidFill>
+                  <a:schemeClr val="tx1"/>
+                </a:solidFill>
+                <a:latin typeface="+mn-lt"/>
+                <a:ea typeface="+mn-ea"/>
+                <a:cs typeface="+mn-cs"/>
+              </a:defRPr>
+            </a:lvl6pPr>
+            <a:lvl7pPr marL="2743200" indent="0" algn="ctr" defTabSz="914400" rtl="0" eaLnBrk="1" latinLnBrk="1" hangingPunct="1">
+              <a:lnSpc>
+                <a:spcPct val="90000"/>
+              </a:lnSpc>
+              <a:spcBef>
+                <a:spcPts val="500"/>
+              </a:spcBef>
+              <a:buFont typeface="Arial" panose="020B0604020202020204" pitchFamily="34" charset="0"/>
+              <a:buNone/>
+              <a:defRPr sz="1600" kern="1200">
+                <a:solidFill>
+                  <a:schemeClr val="tx1"/>
+                </a:solidFill>
+                <a:latin typeface="+mn-lt"/>
+                <a:ea typeface="+mn-ea"/>
+                <a:cs typeface="+mn-cs"/>
+              </a:defRPr>
+            </a:lvl7pPr>
+            <a:lvl8pPr marL="3200400" indent="0" algn="ctr" defTabSz="914400" rtl="0" eaLnBrk="1" latinLnBrk="1" hangingPunct="1">
+              <a:lnSpc>
+                <a:spcPct val="90000"/>
+              </a:lnSpc>
+              <a:spcBef>
+                <a:spcPts val="500"/>
+              </a:spcBef>
+              <a:buFont typeface="Arial" panose="020B0604020202020204" pitchFamily="34" charset="0"/>
+              <a:buNone/>
+              <a:defRPr sz="1600" kern="1200">
+                <a:solidFill>
+                  <a:schemeClr val="tx1"/>
+                </a:solidFill>
+                <a:latin typeface="+mn-lt"/>
+                <a:ea typeface="+mn-ea"/>
+                <a:cs typeface="+mn-cs"/>
+              </a:defRPr>
+            </a:lvl8pPr>
+            <a:lvl9pPr marL="3657600" indent="0" algn="ctr" defTabSz="914400" rtl="0" eaLnBrk="1" latinLnBrk="1" hangingPunct="1">
+              <a:lnSpc>
+                <a:spcPct val="90000"/>
+              </a:lnSpc>
+              <a:spcBef>
+                <a:spcPts val="500"/>
+              </a:spcBef>
+              <a:buFont typeface="Arial" panose="020B0604020202020204" pitchFamily="34" charset="0"/>
+              <a:buNone/>
+              <a:defRPr sz="1600" kern="1200">
+                <a:solidFill>
+                  <a:schemeClr val="tx1"/>
+                </a:solidFill>
+                <a:latin typeface="+mn-lt"/>
+                <a:ea typeface="+mn-ea"/>
+                <a:cs typeface="+mn-cs"/>
+              </a:defRPr>
+            </a:lvl9pPr>
+          </a:lstStyle>
+          <a:p>
+            <a:pPr algn="just"/>
+            <a:r>
+              <a:rPr lang="ko-KR" altLang="en-US" b="1" dirty="0">
+                <a:solidFill>
+                  <a:srgbClr val="2B2B2B"/>
+                </a:solidFill>
+                <a:latin typeface="G마켓 산스 TTF Bold" panose="02000000000000000000" pitchFamily="2" charset="-127"/>
+                <a:ea typeface="G마켓 산스 TTF Bold" panose="02000000000000000000" pitchFamily="2" charset="-127"/>
+                <a:cs typeface="Pretendard SemiBold" panose="02000703000000020004" pitchFamily="2" charset="-127"/>
+              </a:rPr>
+              <a:t>신재생에너지 </a:t>
+            </a:r>
+            <a:r>
+              <a:rPr lang="en-US" altLang="ko-KR" b="1" dirty="0">
+                <a:solidFill>
+                  <a:srgbClr val="2B2B2B"/>
+                </a:solidFill>
+                <a:latin typeface="G마켓 산스 TTF Bold" panose="02000000000000000000" pitchFamily="2" charset="-127"/>
+                <a:ea typeface="G마켓 산스 TTF Bold" panose="02000000000000000000" pitchFamily="2" charset="-127"/>
+                <a:cs typeface="Pretendard SemiBold" panose="02000703000000020004" pitchFamily="2" charset="-127"/>
+              </a:rPr>
+              <a:t>IoT </a:t>
+            </a:r>
+            <a:r>
+              <a:rPr lang="ko-KR" altLang="en-US" b="1" dirty="0">
+                <a:solidFill>
+                  <a:srgbClr val="2B2B2B"/>
+                </a:solidFill>
+                <a:latin typeface="G마켓 산스 TTF Bold" panose="02000000000000000000" pitchFamily="2" charset="-127"/>
+                <a:ea typeface="G마켓 산스 TTF Bold" panose="02000000000000000000" pitchFamily="2" charset="-127"/>
+                <a:cs typeface="Pretendard SemiBold" panose="02000703000000020004" pitchFamily="2" charset="-127"/>
+              </a:rPr>
+              <a:t>개발자 입문 과정</a:t>
+            </a:r>
+          </a:p>
+        </p:txBody>
+      </p:sp>
+      <p:pic>
+        <p:nvPicPr>
+          <p:cNvPr id="11" name="그림 10">
+            <a:extLst>
+              <a:ext uri="{FF2B5EF4-FFF2-40B4-BE49-F238E27FC236}">
+                <a16:creationId xmlns:a16="http://schemas.microsoft.com/office/drawing/2014/main" id="{43B0D367-DE04-26A9-6CB6-502ED4BB2FD3}"/>
+              </a:ext>
+            </a:extLst>
+          </p:cNvPr>
+          <p:cNvPicPr>
+            <a:picLocks noChangeAspect="1"/>
+          </p:cNvPicPr>
+          <p:nvPr/>
+        </p:nvPicPr>
+        <p:blipFill>
+          <a:blip r:embed="rId5">
+            <a:extLst>
+              <a:ext uri="{28A0092B-C50C-407E-A947-70E740481C1C}">
+                <a14:useLocalDpi xmlns:a14="http://schemas.microsoft.com/office/drawing/2010/main" val="0"/>
+              </a:ext>
+            </a:extLst>
+          </a:blip>
+          <a:stretch>
+            <a:fillRect/>
+          </a:stretch>
+        </p:blipFill>
+        <p:spPr>
+          <a:xfrm>
+            <a:off x="2829943" y="3670957"/>
+            <a:ext cx="2303166" cy="347793"/>
+          </a:xfrm>
+          <a:prstGeom prst="rect">
+            <a:avLst/>
+          </a:prstGeom>
+        </p:spPr>
+      </p:pic>
     </p:spTree>
     <p:extLst>
       <p:ext uri="{BB962C8B-B14F-4D97-AF65-F5344CB8AC3E}">
-        <p14:creationId xmlns:p14="http://schemas.microsoft.com/office/powerpoint/2010/main" val="1195912630"/>
+        <p14:creationId xmlns:p14="http://schemas.microsoft.com/office/powerpoint/2010/main" val="747806235"/>
       </p:ext>
     </p:extLst>
   </p:cSld>
@@ -3694,7 +5018,7 @@
           <a:p>
             <a:fld id="{0F78D9C4-20C1-4B15-A116-16DC77AD9A1E}" type="datetime1">
               <a:rPr lang="ko-KR" altLang="en-US" smtClean="0"/>
-              <a:t>2025-09-17</a:t>
+              <a:t>2026-02-10</a:t>
             </a:fld>
             <a:endParaRPr lang="ko-KR" altLang="en-US"/>
           </a:p>
@@ -4118,7 +5442,7 @@
           <a:p>
             <a:fld id="{0F78D9C4-20C1-4B15-A116-16DC77AD9A1E}" type="datetime1">
               <a:rPr lang="ko-KR" altLang="en-US" smtClean="0"/>
-              <a:t>2025-09-17</a:t>
+              <a:t>2026-02-10</a:t>
             </a:fld>
             <a:endParaRPr lang="ko-KR" altLang="en-US"/>
           </a:p>
@@ -4523,7 +5847,7 @@
           <a:p>
             <a:fld id="{0F78D9C4-20C1-4B15-A116-16DC77AD9A1E}" type="datetime1">
               <a:rPr lang="ko-KR" altLang="en-US" smtClean="0"/>
-              <a:t>2025-09-17</a:t>
+              <a:t>2026-02-10</a:t>
             </a:fld>
             <a:endParaRPr lang="ko-KR" altLang="en-US"/>
           </a:p>
@@ -4906,7 +6230,7 @@
           <a:p>
             <a:fld id="{0F78D9C4-20C1-4B15-A116-16DC77AD9A1E}" type="datetime1">
               <a:rPr lang="ko-KR" altLang="en-US" smtClean="0"/>
-              <a:t>2025-09-17</a:t>
+              <a:t>2026-02-10</a:t>
             </a:fld>
             <a:endParaRPr lang="ko-KR" altLang="en-US"/>
           </a:p>
@@ -5025,7 +6349,7 @@
           <a:p>
             <a:fld id="{0F78D9C4-20C1-4B15-A116-16DC77AD9A1E}" type="datetime1">
               <a:rPr lang="ko-KR" altLang="en-US" smtClean="0"/>
-              <a:t>2025-09-17</a:t>
+              <a:t>2026-02-10</a:t>
             </a:fld>
             <a:endParaRPr lang="ko-KR" altLang="en-US"/>
           </a:p>
@@ -5373,7 +6697,7 @@
           <a:p>
             <a:fld id="{0F78D9C4-20C1-4B15-A116-16DC77AD9A1E}" type="datetime1">
               <a:rPr lang="ko-KR" altLang="en-US" smtClean="0"/>
-              <a:t>2025-09-17</a:t>
+              <a:t>2026-02-10</a:t>
             </a:fld>
             <a:endParaRPr lang="ko-KR" altLang="en-US"/>
           </a:p>
@@ -5687,7 +7011,7 @@
           <a:p>
             <a:fld id="{0F78D9C4-20C1-4B15-A116-16DC77AD9A1E}" type="datetime1">
               <a:rPr lang="ko-KR" altLang="en-US" smtClean="0"/>
-              <a:t>2025-09-17</a:t>
+              <a:t>2026-02-10</a:t>
             </a:fld>
             <a:endParaRPr lang="ko-KR" altLang="en-US"/>
           </a:p>
@@ -5817,7 +7141,7 @@
           <a:p>
             <a:fld id="{0F78D9C4-20C1-4B15-A116-16DC77AD9A1E}" type="datetime1">
               <a:rPr lang="ko-KR" altLang="en-US" smtClean="0"/>
-              <a:t>2025-09-17</a:t>
+              <a:t>2026-02-10</a:t>
             </a:fld>
             <a:endParaRPr lang="ko-KR" altLang="en-US"/>
           </a:p>
@@ -6098,6 +7422,28 @@
               <a:rPr lang="ko-KR" altLang="en-US" sz="2000" dirty="0"/>
               <a:t>최종시험</a:t>
             </a:r>
+            <a:endParaRPr lang="en-US" altLang="ko-KR" sz="2000" dirty="0"/>
+          </a:p>
+          <a:p>
+            <a:pPr marL="457200" lvl="1" indent="0">
+              <a:lnSpc>
+                <a:spcPct val="150000"/>
+              </a:lnSpc>
+              <a:buNone/>
+            </a:pPr>
+            <a:r>
+              <a:rPr lang="en-US" altLang="ko-KR" sz="2000" dirty="0"/>
+              <a:t>※ </a:t>
+            </a:r>
+            <a:r>
+              <a:rPr lang="ko-KR" altLang="en-US" sz="2000" dirty="0"/>
+              <a:t>시계열 데이터의 경우 랜덤 분할이 아닌 </a:t>
+            </a:r>
+            <a:r>
+              <a:rPr lang="ko-KR" altLang="en-US" sz="2000" b="1" dirty="0"/>
+              <a:t>시간 기반 분할을 사용함</a:t>
+            </a:r>
+            <a:endParaRPr lang="ko-KR" altLang="en-US" sz="2000" dirty="0"/>
           </a:p>
         </p:txBody>
       </p:sp>
@@ -6461,7 +7807,7 @@
           <a:p>
             <a:fld id="{0F78D9C4-20C1-4B15-A116-16DC77AD9A1E}" type="datetime1">
               <a:rPr lang="ko-KR" altLang="en-US" smtClean="0"/>
-              <a:t>2025-09-17</a:t>
+              <a:t>2026-02-10</a:t>
             </a:fld>
             <a:endParaRPr lang="ko-KR" altLang="en-US"/>
           </a:p>
@@ -6843,7 +8189,7 @@
           <a:p>
             <a:fld id="{0F78D9C4-20C1-4B15-A116-16DC77AD9A1E}" type="datetime1">
               <a:rPr lang="ko-KR" altLang="en-US" smtClean="0"/>
-              <a:t>2025-09-17</a:t>
+              <a:t>2026-02-10</a:t>
             </a:fld>
             <a:endParaRPr lang="ko-KR" altLang="en-US"/>
           </a:p>
@@ -6962,7 +8308,7 @@
           <a:p>
             <a:fld id="{0F78D9C4-20C1-4B15-A116-16DC77AD9A1E}" type="datetime1">
               <a:rPr lang="ko-KR" altLang="en-US" smtClean="0"/>
-              <a:t>2025-09-17</a:t>
+              <a:t>2026-02-10</a:t>
             </a:fld>
             <a:endParaRPr lang="ko-KR" altLang="en-US"/>
           </a:p>
@@ -7102,7 +8448,7 @@
           <a:p>
             <a:fld id="{0F78D9C4-20C1-4B15-A116-16DC77AD9A1E}" type="datetime1">
               <a:rPr lang="ko-KR" altLang="en-US" smtClean="0"/>
-              <a:t>2025-09-17</a:t>
+              <a:t>2026-02-10</a:t>
             </a:fld>
             <a:endParaRPr lang="ko-KR" altLang="en-US"/>
           </a:p>
@@ -7249,7 +8595,7 @@
           <a:p>
             <a:fld id="{0F78D9C4-20C1-4B15-A116-16DC77AD9A1E}" type="datetime1">
               <a:rPr lang="ko-KR" altLang="en-US" smtClean="0"/>
-              <a:t>2025-09-17</a:t>
+              <a:t>2026-02-10</a:t>
             </a:fld>
             <a:endParaRPr lang="ko-KR" altLang="en-US"/>
           </a:p>
@@ -7509,7 +8855,7 @@
           <a:p>
             <a:fld id="{0F78D9C4-20C1-4B15-A116-16DC77AD9A1E}" type="datetime1">
               <a:rPr lang="ko-KR" altLang="en-US" smtClean="0"/>
-              <a:t>2025-09-17</a:t>
+              <a:t>2026-02-10</a:t>
             </a:fld>
             <a:endParaRPr lang="ko-KR" altLang="en-US"/>
           </a:p>
@@ -7931,7 +9277,7 @@
           <a:p>
             <a:fld id="{0F78D9C4-20C1-4B15-A116-16DC77AD9A1E}" type="datetime1">
               <a:rPr lang="ko-KR" altLang="en-US" smtClean="0"/>
-              <a:t>2025-09-17</a:t>
+              <a:t>2026-02-10</a:t>
             </a:fld>
             <a:endParaRPr lang="ko-KR" altLang="en-US"/>
           </a:p>
@@ -8032,12 +9378,24 @@
               <a:t>입력 데이터와 출력 값 간의 관계를 학습하여 </a:t>
             </a:r>
             <a:r>
-              <a:rPr lang="ko-KR" altLang="en-US" b="1" dirty="0"/>
+              <a:rPr lang="ko-KR" altLang="en-US" b="1" dirty="0">
+                <a:highlight>
+                  <a:srgbClr val="FFFF00"/>
+                </a:highlight>
+              </a:rPr>
               <a:t>연속적인 숫자 값</a:t>
             </a:r>
             <a:r>
+              <a:rPr lang="ko-KR" altLang="en-US" dirty="0">
+                <a:highlight>
+                  <a:srgbClr val="FFFF00"/>
+                </a:highlight>
+              </a:rPr>
+              <a:t>을 </a:t>
+            </a:r>
+            <a:r>
               <a:rPr lang="ko-KR" altLang="en-US" dirty="0"/>
-              <a:t>을 예측하는 분석 모형</a:t>
+              <a:t>예측하는 분석 모형</a:t>
             </a:r>
             <a:r>
               <a:rPr lang="en-US" altLang="ko-KR" dirty="0"/>
@@ -8282,7 +9640,7 @@
           <a:p>
             <a:fld id="{0F78D9C4-20C1-4B15-A116-16DC77AD9A1E}" type="datetime1">
               <a:rPr lang="ko-KR" altLang="en-US" smtClean="0"/>
-              <a:t>2025-09-17</a:t>
+              <a:t>2026-02-10</a:t>
             </a:fld>
             <a:endParaRPr lang="ko-KR" altLang="en-US"/>
           </a:p>
@@ -8425,7 +9783,15 @@
             </a:r>
             <a:r>
               <a:rPr lang="ko-KR" altLang="en-US" dirty="0"/>
-              <a:t>주어진 입력 데이터를 범주에 따라 분류</a:t>
+              <a:t>주어진 입력 데이터를 </a:t>
+            </a:r>
+            <a:r>
+              <a:rPr lang="ko-KR" altLang="en-US" dirty="0">
+                <a:highlight>
+                  <a:srgbClr val="FFFF00"/>
+                </a:highlight>
+              </a:rPr>
+              <a:t>범주에 따라 분류</a:t>
             </a:r>
             <a:r>
               <a:rPr lang="en-US" altLang="ko-KR" dirty="0"/>
@@ -8643,7 +10009,7 @@
           <a:p>
             <a:fld id="{0F78D9C4-20C1-4B15-A116-16DC77AD9A1E}" type="datetime1">
               <a:rPr lang="ko-KR" altLang="en-US" smtClean="0"/>
-              <a:t>2025-09-17</a:t>
+              <a:t>2026-02-10</a:t>
             </a:fld>
             <a:endParaRPr lang="ko-KR" altLang="en-US"/>
           </a:p>
@@ -9088,7 +10454,7 @@
           <a:p>
             <a:fld id="{0F78D9C4-20C1-4B15-A116-16DC77AD9A1E}" type="datetime1">
               <a:rPr lang="ko-KR" altLang="en-US" smtClean="0"/>
-              <a:t>2025-09-17</a:t>
+              <a:t>2026-02-10</a:t>
             </a:fld>
             <a:endParaRPr lang="ko-KR" altLang="en-US"/>
           </a:p>
@@ -9604,7 +10970,7 @@
           <a:p>
             <a:fld id="{0F78D9C4-20C1-4B15-A116-16DC77AD9A1E}" type="datetime1">
               <a:rPr lang="ko-KR" altLang="en-US" smtClean="0"/>
-              <a:t>2025-09-17</a:t>
+              <a:t>2026-02-10</a:t>
             </a:fld>
             <a:endParaRPr lang="ko-KR" altLang="en-US"/>
           </a:p>
@@ -10128,7 +11494,7 @@
           <a:p>
             <a:fld id="{0F78D9C4-20C1-4B15-A116-16DC77AD9A1E}" type="datetime1">
               <a:rPr lang="ko-KR" altLang="en-US" smtClean="0"/>
-              <a:t>2025-09-17</a:t>
+              <a:t>2026-02-10</a:t>
             </a:fld>
             <a:endParaRPr lang="ko-KR" altLang="en-US"/>
           </a:p>
@@ -10600,7 +11966,7 @@
           <a:p>
             <a:fld id="{0F78D9C4-20C1-4B15-A116-16DC77AD9A1E}" type="datetime1">
               <a:rPr lang="ko-KR" altLang="en-US" smtClean="0"/>
-              <a:t>2025-09-17</a:t>
+              <a:t>2026-02-10</a:t>
             </a:fld>
             <a:endParaRPr lang="ko-KR" altLang="en-US"/>
           </a:p>
@@ -11162,7 +12528,7 @@
             <a:pPr algn="ctr"/>
             <a:r>
               <a:rPr lang="ko-KR" altLang="en-US" sz="2800" b="1" dirty="0"/>
-              <a:t>입 출력 정의</a:t>
+              <a:t>입출력 정의</a:t>
             </a:r>
           </a:p>
         </p:txBody>
@@ -11190,7 +12556,7 @@
           <a:p>
             <a:fld id="{0F78D9C4-20C1-4B15-A116-16DC77AD9A1E}" type="datetime1">
               <a:rPr lang="ko-KR" altLang="en-US" smtClean="0"/>
-              <a:t>2025-09-17</a:t>
+              <a:t>2026-02-10</a:t>
             </a:fld>
             <a:endParaRPr lang="ko-KR" altLang="en-US"/>
           </a:p>
@@ -11544,16 +12910,10 @@
           <a:lstStyle/>
           <a:p>
             <a:r>
-              <a:rPr lang="ko-KR" altLang="en-US" b="1" dirty="0" err="1">
-                <a:latin typeface="+mj-ea"/>
-              </a:rPr>
-              <a:t>머신러닝의</a:t>
-            </a:r>
-            <a:r>
               <a:rPr lang="ko-KR" altLang="en-US" b="1" dirty="0">
                 <a:latin typeface="+mj-ea"/>
               </a:rPr>
-              <a:t> 과정</a:t>
+              <a:t>머신 러닝의 과정</a:t>
             </a:r>
             <a:endParaRPr lang="ko-KR" altLang="en-US" dirty="0"/>
           </a:p>
@@ -11612,7 +12972,7 @@
           <a:p>
             <a:fld id="{0F78D9C4-20C1-4B15-A116-16DC77AD9A1E}" type="datetime1">
               <a:rPr lang="ko-KR" altLang="en-US" smtClean="0"/>
-              <a:t>2025-09-17</a:t>
+              <a:t>2026-02-10</a:t>
             </a:fld>
             <a:endParaRPr lang="ko-KR" altLang="en-US"/>
           </a:p>
@@ -12080,7 +13440,7 @@
           <a:p>
             <a:fld id="{0F78D9C4-20C1-4B15-A116-16DC77AD9A1E}" type="datetime1">
               <a:rPr lang="ko-KR" altLang="en-US" smtClean="0"/>
-              <a:t>2025-09-17</a:t>
+              <a:t>2026-02-10</a:t>
             </a:fld>
             <a:endParaRPr lang="ko-KR" altLang="en-US"/>
           </a:p>
@@ -13724,7 +15084,7 @@
           <a:p>
             <a:fld id="{0F78D9C4-20C1-4B15-A116-16DC77AD9A1E}" type="datetime1">
               <a:rPr lang="ko-KR" altLang="en-US" smtClean="0"/>
-              <a:t>2025-09-17</a:t>
+              <a:t>2026-02-10</a:t>
             </a:fld>
             <a:endParaRPr lang="ko-KR" altLang="en-US"/>
           </a:p>
@@ -13853,7 +15213,7 @@
           <a:p>
             <a:fld id="{0F78D9C4-20C1-4B15-A116-16DC77AD9A1E}" type="datetime1">
               <a:rPr lang="ko-KR" altLang="en-US" smtClean="0"/>
-              <a:t>2025-09-17</a:t>
+              <a:t>2026-02-10</a:t>
             </a:fld>
             <a:endParaRPr lang="ko-KR" altLang="en-US"/>
           </a:p>
@@ -13998,7 +15358,7 @@
           <a:p>
             <a:fld id="{0F78D9C4-20C1-4B15-A116-16DC77AD9A1E}" type="datetime1">
               <a:rPr lang="ko-KR" altLang="en-US" smtClean="0"/>
-              <a:t>2025-09-17</a:t>
+              <a:t>2026-02-10</a:t>
             </a:fld>
             <a:endParaRPr lang="ko-KR" altLang="en-US"/>
           </a:p>
@@ -14326,7 +15686,7 @@
           <a:p>
             <a:fld id="{0F78D9C4-20C1-4B15-A116-16DC77AD9A1E}" type="datetime1">
               <a:rPr lang="ko-KR" altLang="en-US" smtClean="0"/>
-              <a:t>2025-09-17</a:t>
+              <a:t>2026-02-10</a:t>
             </a:fld>
             <a:endParaRPr lang="ko-KR" altLang="en-US"/>
           </a:p>
@@ -14509,7 +15869,7 @@
           <p:nvPr/>
         </p:nvPicPr>
         <p:blipFill>
-          <a:blip r:embed="rId2">
+          <a:blip r:embed="rId3">
             <a:extLst>
               <a:ext uri="{28A0092B-C50C-407E-A947-70E740481C1C}">
                 <a14:useLocalDpi xmlns:a14="http://schemas.microsoft.com/office/drawing/2010/main" val="0"/>
@@ -14558,7 +15918,7 @@
           <a:p>
             <a:fld id="{0F78D9C4-20C1-4B15-A116-16DC77AD9A1E}" type="datetime1">
               <a:rPr lang="ko-KR" altLang="en-US" smtClean="0"/>
-              <a:t>2025-09-17</a:t>
+              <a:t>2026-02-10</a:t>
             </a:fld>
             <a:endParaRPr lang="ko-KR" altLang="en-US"/>
           </a:p>
@@ -14898,7 +16258,7 @@
           <a:p>
             <a:fld id="{0F78D9C4-20C1-4B15-A116-16DC77AD9A1E}" type="datetime1">
               <a:rPr lang="ko-KR" altLang="en-US" smtClean="0"/>
-              <a:t>2025-09-17</a:t>
+              <a:t>2026-02-10</a:t>
             </a:fld>
             <a:endParaRPr lang="ko-KR" altLang="en-US"/>
           </a:p>
@@ -15176,7 +16536,7 @@
           <a:p>
             <a:fld id="{0F78D9C4-20C1-4B15-A116-16DC77AD9A1E}" type="datetime1">
               <a:rPr lang="ko-KR" altLang="en-US" smtClean="0"/>
-              <a:t>2025-09-17</a:t>
+              <a:t>2026-02-10</a:t>
             </a:fld>
             <a:endParaRPr lang="ko-KR" altLang="en-US"/>
           </a:p>
@@ -15512,7 +16872,7 @@
           <a:p>
             <a:fld id="{0F78D9C4-20C1-4B15-A116-16DC77AD9A1E}" type="datetime1">
               <a:rPr lang="ko-KR" altLang="en-US" smtClean="0"/>
-              <a:t>2025-09-17</a:t>
+              <a:t>2026-02-10</a:t>
             </a:fld>
             <a:endParaRPr lang="ko-KR" altLang="en-US"/>
           </a:p>
@@ -15894,7 +17254,7 @@
           <a:p>
             <a:fld id="{0F78D9C4-20C1-4B15-A116-16DC77AD9A1E}" type="datetime1">
               <a:rPr lang="ko-KR" altLang="en-US" smtClean="0"/>
-              <a:t>2025-09-17</a:t>
+              <a:t>2026-02-10</a:t>
             </a:fld>
             <a:endParaRPr lang="ko-KR" altLang="en-US"/>
           </a:p>
@@ -15974,6 +17334,214 @@
 </file>
 
 <file path=ppt/slides/slide40.xml><?xml version="1.0" encoding="utf-8"?>
+<p:sld xmlns:a="http://schemas.openxmlformats.org/drawingml/2006/main" xmlns:r="http://schemas.openxmlformats.org/officeDocument/2006/relationships" xmlns:p="http://schemas.openxmlformats.org/presentationml/2006/main">
+  <p:cSld>
+    <p:spTree>
+      <p:nvGrpSpPr>
+        <p:cNvPr id="1" name=""/>
+        <p:cNvGrpSpPr/>
+        <p:nvPr/>
+      </p:nvGrpSpPr>
+      <p:grpSpPr>
+        <a:xfrm>
+          <a:off x="0" y="0"/>
+          <a:ext cx="0" cy="0"/>
+          <a:chOff x="0" y="0"/>
+          <a:chExt cx="0" cy="0"/>
+        </a:xfrm>
+      </p:grpSpPr>
+      <p:sp>
+        <p:nvSpPr>
+          <p:cNvPr id="2" name="제목 1">
+            <a:extLst>
+              <a:ext uri="{FF2B5EF4-FFF2-40B4-BE49-F238E27FC236}">
+                <a16:creationId xmlns:a16="http://schemas.microsoft.com/office/drawing/2014/main" id="{BEEEB855-7558-4B87-9779-B978C39D46CE}"/>
+              </a:ext>
+            </a:extLst>
+          </p:cNvPr>
+          <p:cNvSpPr>
+            <a:spLocks noGrp="1"/>
+          </p:cNvSpPr>
+          <p:nvPr>
+            <p:ph type="title"/>
+          </p:nvPr>
+        </p:nvSpPr>
+        <p:spPr/>
+        <p:txBody>
+          <a:bodyPr/>
+          <a:lstStyle/>
+          <a:p>
+            <a:r>
+              <a:rPr lang="ko-KR" altLang="en-US" dirty="0"/>
+              <a:t>모델과 학습의 관계</a:t>
+            </a:r>
+          </a:p>
+        </p:txBody>
+      </p:sp>
+      <p:sp>
+        <p:nvSpPr>
+          <p:cNvPr id="3" name="내용 개체 틀 2">
+            <a:extLst>
+              <a:ext uri="{FF2B5EF4-FFF2-40B4-BE49-F238E27FC236}">
+                <a16:creationId xmlns:a16="http://schemas.microsoft.com/office/drawing/2014/main" id="{AC5C1778-5F0F-B296-876E-C5A1F01ABEA2}"/>
+              </a:ext>
+            </a:extLst>
+          </p:cNvPr>
+          <p:cNvSpPr>
+            <a:spLocks noGrp="1"/>
+          </p:cNvSpPr>
+          <p:nvPr>
+            <p:ph idx="1"/>
+          </p:nvPr>
+        </p:nvSpPr>
+        <p:spPr/>
+        <p:txBody>
+          <a:bodyPr/>
+          <a:lstStyle/>
+          <a:p>
+            <a:r>
+              <a:rPr lang="ko-KR" altLang="en-US" dirty="0"/>
+              <a:t>모델은 입력 → 출력을 만드는 함수</a:t>
+            </a:r>
+            <a:endParaRPr lang="en-US" altLang="ko-KR" dirty="0"/>
+          </a:p>
+          <a:p>
+            <a:r>
+              <a:rPr lang="ko-KR" altLang="en-US" dirty="0"/>
+              <a:t>학습은 예측과 실제의 차이를 줄이는 과정</a:t>
+            </a:r>
+            <a:endParaRPr lang="en-US" altLang="ko-KR" dirty="0"/>
+          </a:p>
+          <a:p>
+            <a:r>
+              <a:rPr lang="ko-KR" altLang="en-US" dirty="0"/>
+              <a:t>이 차이를 기준으로 모델을 조정함</a:t>
+            </a:r>
+          </a:p>
+        </p:txBody>
+      </p:sp>
+    </p:spTree>
+    <p:extLst>
+      <p:ext uri="{BB962C8B-B14F-4D97-AF65-F5344CB8AC3E}">
+        <p14:creationId xmlns:p14="http://schemas.microsoft.com/office/powerpoint/2010/main" val="3118236841"/>
+      </p:ext>
+    </p:extLst>
+  </p:cSld>
+  <p:clrMapOvr>
+    <a:masterClrMapping/>
+  </p:clrMapOvr>
+</p:sld>
+</file>
+
+<file path=ppt/slides/slide41.xml><?xml version="1.0" encoding="utf-8"?>
+<p:sld xmlns:a="http://schemas.openxmlformats.org/drawingml/2006/main" xmlns:r="http://schemas.openxmlformats.org/officeDocument/2006/relationships" xmlns:p="http://schemas.openxmlformats.org/presentationml/2006/main">
+  <p:cSld>
+    <p:spTree>
+      <p:nvGrpSpPr>
+        <p:cNvPr id="1" name=""/>
+        <p:cNvGrpSpPr/>
+        <p:nvPr/>
+      </p:nvGrpSpPr>
+      <p:grpSpPr>
+        <a:xfrm>
+          <a:off x="0" y="0"/>
+          <a:ext cx="0" cy="0"/>
+          <a:chOff x="0" y="0"/>
+          <a:chExt cx="0" cy="0"/>
+        </a:xfrm>
+      </p:grpSpPr>
+      <p:sp>
+        <p:nvSpPr>
+          <p:cNvPr id="2" name="제목 1">
+            <a:extLst>
+              <a:ext uri="{FF2B5EF4-FFF2-40B4-BE49-F238E27FC236}">
+                <a16:creationId xmlns:a16="http://schemas.microsoft.com/office/drawing/2014/main" id="{68136D5F-7342-7CB7-683C-BD8BC725F45E}"/>
+              </a:ext>
+            </a:extLst>
+          </p:cNvPr>
+          <p:cNvSpPr>
+            <a:spLocks noGrp="1"/>
+          </p:cNvSpPr>
+          <p:nvPr>
+            <p:ph type="title"/>
+          </p:nvPr>
+        </p:nvSpPr>
+        <p:spPr/>
+        <p:txBody>
+          <a:bodyPr/>
+          <a:lstStyle/>
+          <a:p>
+            <a:r>
+              <a:rPr lang="ko-KR" altLang="en-US" dirty="0"/>
+              <a:t>왜 ‘조금씩’ 고쳐야 하는가</a:t>
+            </a:r>
+          </a:p>
+        </p:txBody>
+      </p:sp>
+      <p:sp>
+        <p:nvSpPr>
+          <p:cNvPr id="3" name="내용 개체 틀 2">
+            <a:extLst>
+              <a:ext uri="{FF2B5EF4-FFF2-40B4-BE49-F238E27FC236}">
+                <a16:creationId xmlns:a16="http://schemas.microsoft.com/office/drawing/2014/main" id="{B0110188-75DF-8F80-3553-9EBDB7283E7B}"/>
+              </a:ext>
+            </a:extLst>
+          </p:cNvPr>
+          <p:cNvSpPr>
+            <a:spLocks noGrp="1"/>
+          </p:cNvSpPr>
+          <p:nvPr>
+            <p:ph idx="1"/>
+          </p:nvPr>
+        </p:nvSpPr>
+        <p:spPr/>
+        <p:txBody>
+          <a:bodyPr/>
+          <a:lstStyle/>
+          <a:p>
+            <a:r>
+              <a:rPr lang="ko-KR" altLang="en-US" dirty="0"/>
+              <a:t>학습은 한 번에 끝나지 않는다</a:t>
+            </a:r>
+            <a:endParaRPr lang="en-US" altLang="ko-KR" dirty="0"/>
+          </a:p>
+          <a:p>
+            <a:r>
+              <a:rPr lang="ko-KR" altLang="en-US" dirty="0"/>
+              <a:t>처음 예측은 대부분 틀림</a:t>
+            </a:r>
+            <a:endParaRPr lang="en-US" altLang="ko-KR" dirty="0"/>
+          </a:p>
+          <a:p>
+            <a:r>
+              <a:rPr lang="ko-KR" altLang="en-US" dirty="0"/>
+              <a:t>오차를 기준으로 방향을 조정</a:t>
+            </a:r>
+            <a:r>
+              <a:rPr lang="en-US" altLang="ko-KR" dirty="0"/>
+              <a:t>, </a:t>
+            </a:r>
+            <a:r>
+              <a:rPr lang="ko-KR" altLang="en-US" dirty="0"/>
+              <a:t>이 과정을 반복하며 개선</a:t>
+            </a:r>
+          </a:p>
+        </p:txBody>
+      </p:sp>
+    </p:spTree>
+    <p:extLst>
+      <p:ext uri="{BB962C8B-B14F-4D97-AF65-F5344CB8AC3E}">
+        <p14:creationId xmlns:p14="http://schemas.microsoft.com/office/powerpoint/2010/main" val="2908467102"/>
+      </p:ext>
+    </p:extLst>
+  </p:cSld>
+  <p:clrMapOvr>
+    <a:masterClrMapping/>
+  </p:clrMapOvr>
+</p:sld>
+</file>
+
+<file path=ppt/slides/slide42.xml><?xml version="1.0" encoding="utf-8"?>
 <p:sld xmlns:a="http://schemas.openxmlformats.org/drawingml/2006/main" xmlns:r="http://schemas.openxmlformats.org/officeDocument/2006/relationships" xmlns:p="http://schemas.openxmlformats.org/presentationml/2006/main">
   <p:cSld>
     <p:spTree>
@@ -16428,7 +17996,7 @@
           <a:p>
             <a:fld id="{0F78D9C4-20C1-4B15-A116-16DC77AD9A1E}" type="datetime1">
               <a:rPr lang="ko-KR" altLang="en-US" smtClean="0"/>
-              <a:t>2025-09-17</a:t>
+              <a:t>2026-02-10</a:t>
             </a:fld>
             <a:endParaRPr lang="ko-KR" altLang="en-US"/>
           </a:p>
@@ -16980,7 +18548,7 @@
           <a:p>
             <a:fld id="{0F78D9C4-20C1-4B15-A116-16DC77AD9A1E}" type="datetime1">
               <a:rPr lang="ko-KR" altLang="en-US" smtClean="0"/>
-              <a:t>2025-09-17</a:t>
+              <a:t>2026-02-10</a:t>
             </a:fld>
             <a:endParaRPr lang="ko-KR" altLang="en-US"/>
           </a:p>
@@ -17385,7 +18953,7 @@
           <a:p>
             <a:fld id="{0F78D9C4-20C1-4B15-A116-16DC77AD9A1E}" type="datetime1">
               <a:rPr lang="ko-KR" altLang="en-US" smtClean="0"/>
-              <a:t>2025-09-17</a:t>
+              <a:t>2026-02-10</a:t>
             </a:fld>
             <a:endParaRPr lang="ko-KR" altLang="en-US"/>
           </a:p>
@@ -17785,7 +19353,7 @@
           <a:p>
             <a:fld id="{0F78D9C4-20C1-4B15-A116-16DC77AD9A1E}" type="datetime1">
               <a:rPr lang="ko-KR" altLang="en-US" smtClean="0"/>
-              <a:t>2025-09-17</a:t>
+              <a:t>2026-02-10</a:t>
             </a:fld>
             <a:endParaRPr lang="ko-KR" altLang="en-US"/>
           </a:p>
@@ -18038,7 +19606,7 @@
           <a:p>
             <a:fld id="{0F78D9C4-20C1-4B15-A116-16DC77AD9A1E}" type="datetime1">
               <a:rPr lang="ko-KR" altLang="en-US" smtClean="0"/>
-              <a:t>2025-09-17</a:t>
+              <a:t>2026-02-10</a:t>
             </a:fld>
             <a:endParaRPr lang="ko-KR" altLang="en-US"/>
           </a:p>

--- a/material/5_AI/08_머신러닝 기초.pptx
+++ b/material/5_AI/08_머신러닝 기초.pptx
@@ -259,7 +259,7 @@
             <a:fld id="{A13A867C-D490-40C2-AB8D-A60FA70A9BF5}" type="datetimeFigureOut">
               <a:rPr lang="ko-KR" altLang="en-US" smtClean="0"/>
               <a:pPr/>
-              <a:t>2026-02-10</a:t>
+              <a:t>2026-02-12</a:t>
             </a:fld>
             <a:endParaRPr lang="ko-KR" altLang="en-US" dirty="0"/>
           </a:p>
@@ -1015,6 +1015,94 @@
           <a:bodyPr/>
           <a:lstStyle/>
           <a:p>
+            <a:r>
+              <a:rPr lang="ko-KR" altLang="en-US" dirty="0"/>
+              <a:t>카테고리를 예측하는 문제</a:t>
+            </a:r>
+          </a:p>
+        </p:txBody>
+      </p:sp>
+      <p:sp>
+        <p:nvSpPr>
+          <p:cNvPr id="4" name="슬라이드 번호 개체 틀 3"/>
+          <p:cNvSpPr>
+            <a:spLocks noGrp="1"/>
+          </p:cNvSpPr>
+          <p:nvPr>
+            <p:ph type="sldNum" sz="quarter" idx="5"/>
+          </p:nvPr>
+        </p:nvSpPr>
+        <p:spPr/>
+        <p:txBody>
+          <a:bodyPr/>
+          <a:lstStyle/>
+          <a:p>
+            <a:fld id="{3E35EA20-6519-4513-9EDC-C89C5369BAEC}" type="slidenum">
+              <a:rPr lang="ko-KR" altLang="en-US" smtClean="0"/>
+              <a:pPr/>
+              <a:t>24</a:t>
+            </a:fld>
+            <a:endParaRPr lang="ko-KR" altLang="en-US" dirty="0"/>
+          </a:p>
+        </p:txBody>
+      </p:sp>
+    </p:spTree>
+    <p:extLst>
+      <p:ext uri="{BB962C8B-B14F-4D97-AF65-F5344CB8AC3E}">
+        <p14:creationId xmlns:p14="http://schemas.microsoft.com/office/powerpoint/2010/main" val="2409313000"/>
+      </p:ext>
+    </p:extLst>
+  </p:cSld>
+  <p:clrMapOvr>
+    <a:masterClrMapping/>
+  </p:clrMapOvr>
+</p:notes>
+</file>
+
+<file path=ppt/notesSlides/notesSlide15.xml><?xml version="1.0" encoding="utf-8"?>
+<p:notes xmlns:a="http://schemas.openxmlformats.org/drawingml/2006/main" xmlns:r="http://schemas.openxmlformats.org/officeDocument/2006/relationships" xmlns:p="http://schemas.openxmlformats.org/presentationml/2006/main">
+  <p:cSld>
+    <p:spTree>
+      <p:nvGrpSpPr>
+        <p:cNvPr id="1" name=""/>
+        <p:cNvGrpSpPr/>
+        <p:nvPr/>
+      </p:nvGrpSpPr>
+      <p:grpSpPr>
+        <a:xfrm>
+          <a:off x="0" y="0"/>
+          <a:ext cx="0" cy="0"/>
+          <a:chOff x="0" y="0"/>
+          <a:chExt cx="0" cy="0"/>
+        </a:xfrm>
+      </p:grpSpPr>
+      <p:sp>
+        <p:nvSpPr>
+          <p:cNvPr id="2" name="슬라이드 이미지 개체 틀 1"/>
+          <p:cNvSpPr>
+            <a:spLocks noGrp="1" noRot="1" noChangeAspect="1"/>
+          </p:cNvSpPr>
+          <p:nvPr>
+            <p:ph type="sldImg"/>
+          </p:nvPr>
+        </p:nvSpPr>
+        <p:spPr/>
+      </p:sp>
+      <p:sp>
+        <p:nvSpPr>
+          <p:cNvPr id="3" name="슬라이드 노트 개체 틀 2"/>
+          <p:cNvSpPr>
+            <a:spLocks noGrp="1"/>
+          </p:cNvSpPr>
+          <p:nvPr>
+            <p:ph type="body" idx="1"/>
+          </p:nvPr>
+        </p:nvSpPr>
+        <p:spPr/>
+        <p:txBody>
+          <a:bodyPr/>
+          <a:lstStyle/>
+          <a:p>
             <a:endParaRPr lang="ko-KR" altLang="en-US" dirty="0"/>
           </a:p>
         </p:txBody>
@@ -1055,7 +1143,7 @@
 </p:notes>
 </file>
 
-<file path=ppt/notesSlides/notesSlide15.xml><?xml version="1.0" encoding="utf-8"?>
+<file path=ppt/notesSlides/notesSlide16.xml><?xml version="1.0" encoding="utf-8"?>
 <p:notes xmlns:a="http://schemas.openxmlformats.org/drawingml/2006/main" xmlns:r="http://schemas.openxmlformats.org/officeDocument/2006/relationships" xmlns:p="http://schemas.openxmlformats.org/presentationml/2006/main">
   <p:cSld>
     <p:spTree>
@@ -1154,253 +1242,6 @@
     <p:extLst>
       <p:ext uri="{BB962C8B-B14F-4D97-AF65-F5344CB8AC3E}">
         <p14:creationId xmlns:p14="http://schemas.microsoft.com/office/powerpoint/2010/main" val="2080043996"/>
-      </p:ext>
-    </p:extLst>
-  </p:cSld>
-  <p:clrMapOvr>
-    <a:masterClrMapping/>
-  </p:clrMapOvr>
-</p:notes>
-</file>
-
-<file path=ppt/notesSlides/notesSlide16.xml><?xml version="1.0" encoding="utf-8"?>
-<p:notes xmlns:a="http://schemas.openxmlformats.org/drawingml/2006/main" xmlns:r="http://schemas.openxmlformats.org/officeDocument/2006/relationships" xmlns:p="http://schemas.openxmlformats.org/presentationml/2006/main">
-  <p:cSld>
-    <p:spTree>
-      <p:nvGrpSpPr>
-        <p:cNvPr id="1" name=""/>
-        <p:cNvGrpSpPr/>
-        <p:nvPr/>
-      </p:nvGrpSpPr>
-      <p:grpSpPr>
-        <a:xfrm>
-          <a:off x="0" y="0"/>
-          <a:ext cx="0" cy="0"/>
-          <a:chOff x="0" y="0"/>
-          <a:chExt cx="0" cy="0"/>
-        </a:xfrm>
-      </p:grpSpPr>
-      <p:sp>
-        <p:nvSpPr>
-          <p:cNvPr id="2" name="슬라이드 이미지 개체 틀 1"/>
-          <p:cNvSpPr>
-            <a:spLocks noGrp="1" noRot="1" noChangeAspect="1"/>
-          </p:cNvSpPr>
-          <p:nvPr>
-            <p:ph type="sldImg"/>
-          </p:nvPr>
-        </p:nvSpPr>
-        <p:spPr/>
-      </p:sp>
-      <p:sp>
-        <p:nvSpPr>
-          <p:cNvPr id="3" name="슬라이드 노트 개체 틀 2"/>
-          <p:cNvSpPr>
-            <a:spLocks noGrp="1"/>
-          </p:cNvSpPr>
-          <p:nvPr>
-            <p:ph type="body" idx="1"/>
-          </p:nvPr>
-        </p:nvSpPr>
-        <p:spPr/>
-        <p:txBody>
-          <a:bodyPr/>
-          <a:lstStyle/>
-          <a:p>
-            <a:r>
-              <a:rPr lang="en-US" altLang="ko-KR" dirty="0"/>
-              <a:t>ANN</a:t>
-            </a:r>
-            <a:r>
-              <a:rPr lang="ko-KR" altLang="en-US" dirty="0"/>
-              <a:t>은</a:t>
-            </a:r>
-            <a:br>
-              <a:rPr lang="ko-KR" altLang="en-US" dirty="0"/>
-            </a:br>
-            <a:r>
-              <a:rPr lang="ko-KR" altLang="en-US" dirty="0"/>
-              <a:t>입력과 출력 사이의 복잡한 관계를</a:t>
-            </a:r>
-            <a:br>
-              <a:rPr lang="ko-KR" altLang="en-US" dirty="0"/>
-            </a:br>
-            <a:r>
-              <a:rPr lang="ko-KR" altLang="en-US" dirty="0"/>
-              <a:t>여러 단계로 나눠 표현하는 모델이다</a:t>
-            </a:r>
-            <a:r>
-              <a:rPr lang="en-US" altLang="ko-KR" dirty="0"/>
-              <a:t>.</a:t>
-            </a:r>
-          </a:p>
-          <a:p>
-            <a:endParaRPr lang="en-US" altLang="ko-KR" dirty="0"/>
-          </a:p>
-          <a:p>
-            <a:r>
-              <a:rPr lang="ko-KR" altLang="en-US" b="1" dirty="0"/>
-              <a:t>기존 모델의 한계</a:t>
-            </a:r>
-          </a:p>
-          <a:p>
-            <a:r>
-              <a:rPr lang="ko-KR" altLang="en-US" dirty="0"/>
-              <a:t>선형 회귀</a:t>
-            </a:r>
-            <a:r>
-              <a:rPr lang="en-US" altLang="ko-KR" dirty="0"/>
-              <a:t>: </a:t>
-            </a:r>
-            <a:r>
-              <a:rPr lang="ko-KR" altLang="en-US" dirty="0"/>
-              <a:t>직선만 표현 가능</a:t>
-            </a:r>
-          </a:p>
-          <a:p>
-            <a:r>
-              <a:rPr lang="ko-KR" altLang="en-US" dirty="0"/>
-              <a:t>실제 데이터</a:t>
-            </a:r>
-            <a:r>
-              <a:rPr lang="en-US" altLang="ko-KR" dirty="0"/>
-              <a:t>: </a:t>
-            </a:r>
-            <a:r>
-              <a:rPr lang="ko-KR" altLang="en-US" dirty="0"/>
-              <a:t>훨씬 복잡</a:t>
-            </a:r>
-          </a:p>
-          <a:p>
-            <a:r>
-              <a:rPr lang="ko-KR" altLang="en-US" dirty="0"/>
-              <a:t>“현실 데이터는</a:t>
-            </a:r>
-            <a:br>
-              <a:rPr lang="ko-KR" altLang="en-US" dirty="0"/>
-            </a:br>
-            <a:r>
-              <a:rPr lang="ko-KR" altLang="en-US" dirty="0"/>
-              <a:t>직선 하나로 설명되지 않습니다</a:t>
-            </a:r>
-            <a:r>
-              <a:rPr lang="en-US" altLang="ko-KR" dirty="0"/>
-              <a:t>.”</a:t>
-            </a:r>
-          </a:p>
-          <a:p>
-            <a:r>
-              <a:rPr lang="ko-KR" altLang="en-US" dirty="0"/>
-              <a:t>👉 그래서 </a:t>
-            </a:r>
-            <a:r>
-              <a:rPr lang="ko-KR" altLang="en-US" b="1" dirty="0"/>
-              <a:t>여러 단계를 쌓아보자</a:t>
-            </a:r>
-            <a:r>
-              <a:rPr lang="ko-KR" altLang="en-US" dirty="0"/>
-              <a:t>는 아이디어가 나옴</a:t>
-            </a:r>
-          </a:p>
-          <a:p>
-            <a:endParaRPr lang="en-US" altLang="ko-KR" dirty="0"/>
-          </a:p>
-          <a:p>
-            <a:endParaRPr lang="en-US" altLang="ko-KR" dirty="0"/>
-          </a:p>
-          <a:p>
-            <a:endParaRPr lang="en-US" altLang="ko-KR" dirty="0"/>
-          </a:p>
-          <a:p>
-            <a:r>
-              <a:rPr lang="ko-KR" altLang="en-US" dirty="0"/>
-              <a:t>“이 인공신경망 구조를</a:t>
-            </a:r>
-            <a:br>
-              <a:rPr lang="ko-KR" altLang="en-US" dirty="0"/>
-            </a:br>
-            <a:r>
-              <a:rPr lang="ko-KR" altLang="en-US" dirty="0"/>
-              <a:t>실제 코드로 구현하는 도구가</a:t>
-            </a:r>
-            <a:br>
-              <a:rPr lang="ko-KR" altLang="en-US" dirty="0"/>
-            </a:br>
-            <a:r>
-              <a:rPr lang="ko-KR" altLang="en-US" dirty="0"/>
-              <a:t>바로 </a:t>
-            </a:r>
-            <a:r>
-              <a:rPr lang="en-US" altLang="ko-KR" b="1" dirty="0" err="1"/>
-              <a:t>PyTorch</a:t>
-            </a:r>
-            <a:r>
-              <a:rPr lang="ko-KR" altLang="en-US" dirty="0"/>
-              <a:t>입니다</a:t>
-            </a:r>
-            <a:r>
-              <a:rPr lang="en-US" altLang="ko-KR" dirty="0"/>
-              <a:t>.”</a:t>
-            </a:r>
-          </a:p>
-          <a:p>
-            <a:r>
-              <a:rPr lang="en-US" altLang="ko-KR" dirty="0"/>
-              <a:t>“</a:t>
-            </a:r>
-            <a:r>
-              <a:rPr lang="ko-KR" altLang="en-US" dirty="0"/>
-              <a:t>지금은 구조를 이해하고</a:t>
-            </a:r>
-            <a:r>
-              <a:rPr lang="en-US" altLang="ko-KR" dirty="0"/>
-              <a:t>,</a:t>
-            </a:r>
-            <a:br>
-              <a:rPr lang="en-US" altLang="ko-KR" dirty="0"/>
-            </a:br>
-            <a:r>
-              <a:rPr lang="ko-KR" altLang="en-US" dirty="0"/>
-              <a:t>구현은 다음 단계에서 합니다</a:t>
-            </a:r>
-            <a:r>
-              <a:rPr lang="en-US" altLang="ko-KR" dirty="0"/>
-              <a:t>.”</a:t>
-            </a:r>
-          </a:p>
-          <a:p>
-            <a:endParaRPr lang="ko-KR" altLang="en-US" dirty="0"/>
-          </a:p>
-        </p:txBody>
-      </p:sp>
-      <p:sp>
-        <p:nvSpPr>
-          <p:cNvPr id="4" name="슬라이드 번호 개체 틀 3"/>
-          <p:cNvSpPr>
-            <a:spLocks noGrp="1"/>
-          </p:cNvSpPr>
-          <p:nvPr>
-            <p:ph type="sldNum" sz="quarter" idx="5"/>
-          </p:nvPr>
-        </p:nvSpPr>
-        <p:spPr/>
-        <p:txBody>
-          <a:bodyPr/>
-          <a:lstStyle/>
-          <a:p>
-            <a:fld id="{3E35EA20-6519-4513-9EDC-C89C5369BAEC}" type="slidenum">
-              <a:rPr lang="ko-KR" altLang="en-US" smtClean="0"/>
-              <a:pPr/>
-              <a:t>36</a:t>
-            </a:fld>
-            <a:endParaRPr lang="ko-KR" altLang="en-US" dirty="0"/>
-          </a:p>
-        </p:txBody>
-      </p:sp>
-    </p:spTree>
-    <p:extLst>
-      <p:ext uri="{BB962C8B-B14F-4D97-AF65-F5344CB8AC3E}">
-        <p14:creationId xmlns:p14="http://schemas.microsoft.com/office/powerpoint/2010/main" val="4129296451"/>
       </p:ext>
     </p:extLst>
   </p:cSld>
@@ -1455,24 +1296,167 @@
           <a:lstStyle/>
           <a:p>
             <a:r>
+              <a:rPr lang="en-US" altLang="ko-KR" dirty="0"/>
+              <a:t>ANN</a:t>
+            </a:r>
+            <a:r>
               <a:rPr lang="ko-KR" altLang="en-US" dirty="0"/>
-              <a:t>“이제부터 볼 회귀와 </a:t>
-            </a:r>
-            <a:r>
-              <a:rPr lang="ko-KR" altLang="en-US" dirty="0" err="1"/>
-              <a:t>경사하강법은</a:t>
+              <a:t>은</a:t>
             </a:r>
             <a:br>
               <a:rPr lang="ko-KR" altLang="en-US" dirty="0"/>
             </a:br>
             <a:r>
               <a:rPr lang="ko-KR" altLang="en-US" dirty="0"/>
-              <a:t>이 과정을 수학적으로 표현한 것입니다</a:t>
+              <a:t>입력과 출력 사이의 복잡한 관계를</a:t>
+            </a:r>
+            <a:br>
+              <a:rPr lang="ko-KR" altLang="en-US" dirty="0"/>
+            </a:br>
+            <a:r>
+              <a:rPr lang="ko-KR" altLang="en-US" dirty="0"/>
+              <a:t>여러 단계로 나눠 표현하는 모델이다</a:t>
+            </a:r>
+            <a:r>
+              <a:rPr lang="en-US" altLang="ko-KR" dirty="0"/>
+              <a:t>.</a:t>
+            </a:r>
+          </a:p>
+          <a:p>
+            <a:endParaRPr lang="en-US" altLang="ko-KR" dirty="0"/>
+          </a:p>
+          <a:p>
+            <a:r>
+              <a:rPr lang="ko-KR" altLang="en-US" b="1" dirty="0"/>
+              <a:t>기존 모델의 한계</a:t>
+            </a:r>
+          </a:p>
+          <a:p>
+            <a:r>
+              <a:rPr lang="ko-KR" altLang="en-US" dirty="0"/>
+              <a:t>선형 회귀</a:t>
+            </a:r>
+            <a:r>
+              <a:rPr lang="en-US" altLang="ko-KR" dirty="0"/>
+              <a:t>: </a:t>
+            </a:r>
+            <a:r>
+              <a:rPr lang="ko-KR" altLang="en-US" dirty="0"/>
+              <a:t>직선만 표현 가능</a:t>
+            </a:r>
+          </a:p>
+          <a:p>
+            <a:r>
+              <a:rPr lang="ko-KR" altLang="en-US" dirty="0"/>
+              <a:t>실제 데이터</a:t>
+            </a:r>
+            <a:r>
+              <a:rPr lang="en-US" altLang="ko-KR" dirty="0"/>
+              <a:t>: </a:t>
+            </a:r>
+            <a:r>
+              <a:rPr lang="ko-KR" altLang="en-US" dirty="0"/>
+              <a:t>훨씬 복잡</a:t>
+            </a:r>
+          </a:p>
+          <a:p>
+            <a:r>
+              <a:rPr lang="ko-KR" altLang="en-US" dirty="0"/>
+              <a:t>“현실 데이터는</a:t>
+            </a:r>
+            <a:br>
+              <a:rPr lang="ko-KR" altLang="en-US" dirty="0"/>
+            </a:br>
+            <a:r>
+              <a:rPr lang="ko-KR" altLang="en-US" dirty="0"/>
+              <a:t>직선 하나로 설명되지 않습니다</a:t>
             </a:r>
             <a:r>
               <a:rPr lang="en-US" altLang="ko-KR" dirty="0"/>
               <a:t>.”</a:t>
             </a:r>
+          </a:p>
+          <a:p>
+            <a:r>
+              <a:rPr lang="ko-KR" altLang="en-US" dirty="0"/>
+              <a:t>👉 그래서 </a:t>
+            </a:r>
+            <a:r>
+              <a:rPr lang="ko-KR" altLang="en-US" b="1" dirty="0"/>
+              <a:t>여러 단계를 쌓아보자</a:t>
+            </a:r>
+            <a:r>
+              <a:rPr lang="ko-KR" altLang="en-US" dirty="0"/>
+              <a:t>는 아이디어가 나옴</a:t>
+            </a:r>
+          </a:p>
+          <a:p>
+            <a:endParaRPr lang="en-US" altLang="ko-KR" dirty="0"/>
+          </a:p>
+          <a:p>
+            <a:endParaRPr lang="en-US" altLang="ko-KR" dirty="0"/>
+          </a:p>
+          <a:p>
+            <a:endParaRPr lang="en-US" altLang="ko-KR" dirty="0"/>
+          </a:p>
+          <a:p>
+            <a:r>
+              <a:rPr lang="ko-KR" altLang="en-US" dirty="0"/>
+              <a:t>“이 인공신경망 구조를</a:t>
+            </a:r>
+            <a:br>
+              <a:rPr lang="ko-KR" altLang="en-US" dirty="0"/>
+            </a:br>
+            <a:r>
+              <a:rPr lang="ko-KR" altLang="en-US" dirty="0"/>
+              <a:t>실제 코드로 구현하는 도구가</a:t>
+            </a:r>
+            <a:br>
+              <a:rPr lang="ko-KR" altLang="en-US" dirty="0"/>
+            </a:br>
+            <a:r>
+              <a:rPr lang="ko-KR" altLang="en-US" dirty="0"/>
+              <a:t>바로 </a:t>
+            </a:r>
+            <a:r>
+              <a:rPr lang="en-US" altLang="ko-KR" b="1" dirty="0" err="1"/>
+              <a:t>PyTorch</a:t>
+            </a:r>
+            <a:r>
+              <a:rPr lang="ko-KR" altLang="en-US" dirty="0"/>
+              <a:t>입니다</a:t>
+            </a:r>
+            <a:r>
+              <a:rPr lang="en-US" altLang="ko-KR" dirty="0"/>
+              <a:t>.”</a:t>
+            </a:r>
+          </a:p>
+          <a:p>
+            <a:r>
+              <a:rPr lang="en-US" altLang="ko-KR" dirty="0"/>
+              <a:t>“</a:t>
+            </a:r>
+            <a:r>
+              <a:rPr lang="ko-KR" altLang="en-US" dirty="0"/>
+              <a:t>지금은 구조를 이해하고</a:t>
+            </a:r>
+            <a:r>
+              <a:rPr lang="en-US" altLang="ko-KR" dirty="0"/>
+              <a:t>,</a:t>
+            </a:r>
+            <a:br>
+              <a:rPr lang="en-US" altLang="ko-KR" dirty="0"/>
+            </a:br>
+            <a:r>
+              <a:rPr lang="ko-KR" altLang="en-US" dirty="0"/>
+              <a:t>구현은 다음 단계에서 합니다</a:t>
+            </a:r>
+            <a:r>
+              <a:rPr lang="en-US" altLang="ko-KR" dirty="0"/>
+              <a:t>.”</a:t>
+            </a:r>
+          </a:p>
+          <a:p>
             <a:endParaRPr lang="ko-KR" altLang="en-US" dirty="0"/>
           </a:p>
         </p:txBody>
@@ -1495,7 +1479,7 @@
             <a:fld id="{3E35EA20-6519-4513-9EDC-C89C5369BAEC}" type="slidenum">
               <a:rPr lang="ko-KR" altLang="en-US" smtClean="0"/>
               <a:pPr/>
-              <a:t>40</a:t>
+              <a:t>36</a:t>
             </a:fld>
             <a:endParaRPr lang="ko-KR" altLang="en-US" dirty="0"/>
           </a:p>
@@ -1504,7 +1488,7 @@
     </p:spTree>
     <p:extLst>
       <p:ext uri="{BB962C8B-B14F-4D97-AF65-F5344CB8AC3E}">
-        <p14:creationId xmlns:p14="http://schemas.microsoft.com/office/powerpoint/2010/main" val="4254339168"/>
+        <p14:creationId xmlns:p14="http://schemas.microsoft.com/office/powerpoint/2010/main" val="4129296451"/>
       </p:ext>
     </p:extLst>
   </p:cSld>
@@ -1560,7 +1544,7 @@
           <a:p>
             <a:r>
               <a:rPr lang="ko-KR" altLang="en-US" dirty="0"/>
-              <a:t>“</a:t>
+              <a:t>“이제부터 볼 회귀와 </a:t>
             </a:r>
             <a:r>
               <a:rPr lang="ko-KR" altLang="en-US" dirty="0" err="1"/>
@@ -1571,121 +1555,12 @@
             </a:br>
             <a:r>
               <a:rPr lang="ko-KR" altLang="en-US" dirty="0"/>
-              <a:t>‘어디로 얼마나 </a:t>
-            </a:r>
-            <a:r>
-              <a:rPr lang="ko-KR" altLang="en-US" dirty="0" err="1"/>
-              <a:t>고칠지’를</a:t>
-            </a:r>
-            <a:r>
-              <a:rPr lang="ko-KR" altLang="en-US" dirty="0"/>
-              <a:t> 정하는 규칙입니다</a:t>
+              <a:t>이 과정을 수학적으로 표현한 것입니다</a:t>
             </a:r>
             <a:r>
               <a:rPr lang="en-US" altLang="ko-KR" dirty="0"/>
               <a:t>.”</a:t>
             </a:r>
-          </a:p>
-          <a:p>
-            <a:endParaRPr lang="en-US" altLang="ko-KR" dirty="0"/>
-          </a:p>
-          <a:p>
-            <a:r>
-              <a:rPr lang="ko-KR" altLang="en-US" dirty="0"/>
-              <a:t>“지금까지 우리는</a:t>
-            </a:r>
-            <a:br>
-              <a:rPr lang="ko-KR" altLang="en-US" dirty="0"/>
-            </a:br>
-            <a:r>
-              <a:rPr lang="ko-KR" altLang="en-US" dirty="0"/>
-              <a:t>모델이 무엇인지</a:t>
-            </a:r>
-            <a:r>
-              <a:rPr lang="en-US" altLang="ko-KR" dirty="0"/>
-              <a:t>,</a:t>
-            </a:r>
-            <a:br>
-              <a:rPr lang="en-US" altLang="ko-KR" dirty="0"/>
-            </a:br>
-            <a:r>
-              <a:rPr lang="ko-KR" altLang="en-US" dirty="0"/>
-              <a:t>학습이 무엇인지 개념적으로 봤습니다</a:t>
-            </a:r>
-            <a:r>
-              <a:rPr lang="en-US" altLang="ko-KR" dirty="0"/>
-              <a:t>.</a:t>
-            </a:r>
-          </a:p>
-          <a:p>
-            <a:r>
-              <a:rPr lang="ko-KR" altLang="en-US" dirty="0"/>
-              <a:t>이제부터는</a:t>
-            </a:r>
-            <a:br>
-              <a:rPr lang="ko-KR" altLang="en-US" dirty="0"/>
-            </a:br>
-            <a:r>
-              <a:rPr lang="ko-KR" altLang="en-US" dirty="0"/>
-              <a:t>가장 단순한 모델인 </a:t>
-            </a:r>
-            <a:r>
-              <a:rPr lang="ko-KR" altLang="en-US" b="1" dirty="0"/>
-              <a:t>회귀</a:t>
-            </a:r>
-            <a:r>
-              <a:rPr lang="ko-KR" altLang="en-US" dirty="0"/>
-              <a:t>를 통해</a:t>
-            </a:r>
-            <a:br>
-              <a:rPr lang="ko-KR" altLang="en-US" dirty="0"/>
-            </a:br>
-            <a:r>
-              <a:rPr lang="ko-KR" altLang="en-US" dirty="0"/>
-              <a:t>‘모델이 실제로 어떻게 </a:t>
-            </a:r>
-            <a:r>
-              <a:rPr lang="ko-KR" altLang="en-US" dirty="0" err="1"/>
-              <a:t>학습되는지’를</a:t>
-            </a:r>
-            <a:br>
-              <a:rPr lang="ko-KR" altLang="en-US" dirty="0"/>
-            </a:br>
-            <a:r>
-              <a:rPr lang="ko-KR" altLang="en-US" dirty="0"/>
-              <a:t>하나씩 뜯어보겠습니다</a:t>
-            </a:r>
-            <a:r>
-              <a:rPr lang="en-US" altLang="ko-KR" dirty="0"/>
-              <a:t>.</a:t>
-            </a:r>
-          </a:p>
-          <a:p>
-            <a:r>
-              <a:rPr lang="ko-KR" altLang="en-US" dirty="0"/>
-              <a:t>그 핵심 규칙이</a:t>
-            </a:r>
-            <a:br>
-              <a:rPr lang="ko-KR" altLang="en-US" dirty="0"/>
-            </a:br>
-            <a:r>
-              <a:rPr lang="ko-KR" altLang="en-US" dirty="0"/>
-              <a:t>바로 </a:t>
-            </a:r>
-            <a:r>
-              <a:rPr lang="ko-KR" altLang="en-US" b="1" dirty="0" err="1"/>
-              <a:t>경사하강법</a:t>
-            </a:r>
-            <a:r>
-              <a:rPr lang="ko-KR" altLang="en-US" dirty="0" err="1"/>
-              <a:t>입니다</a:t>
-            </a:r>
-            <a:r>
-              <a:rPr lang="en-US" altLang="ko-KR" dirty="0"/>
-              <a:t>.”</a:t>
-            </a:r>
-          </a:p>
-          <a:p>
             <a:endParaRPr lang="ko-KR" altLang="en-US" dirty="0"/>
           </a:p>
         </p:txBody>
@@ -1708,7 +1583,7 @@
             <a:fld id="{3E35EA20-6519-4513-9EDC-C89C5369BAEC}" type="slidenum">
               <a:rPr lang="ko-KR" altLang="en-US" smtClean="0"/>
               <a:pPr/>
-              <a:t>41</a:t>
+              <a:t>40</a:t>
             </a:fld>
             <a:endParaRPr lang="ko-KR" altLang="en-US" dirty="0"/>
           </a:p>
@@ -1717,7 +1592,7 @@
     </p:spTree>
     <p:extLst>
       <p:ext uri="{BB962C8B-B14F-4D97-AF65-F5344CB8AC3E}">
-        <p14:creationId xmlns:p14="http://schemas.microsoft.com/office/powerpoint/2010/main" val="2246056440"/>
+        <p14:creationId xmlns:p14="http://schemas.microsoft.com/office/powerpoint/2010/main" val="4254339168"/>
       </p:ext>
     </p:extLst>
   </p:cSld>
@@ -1732,13 +1607,7 @@
   <p:cSld>
     <p:spTree>
       <p:nvGrpSpPr>
-        <p:cNvPr id="1" name="">
-          <a:extLst>
-            <a:ext uri="{FF2B5EF4-FFF2-40B4-BE49-F238E27FC236}">
-              <a16:creationId xmlns:a16="http://schemas.microsoft.com/office/drawing/2014/main" id="{A9D2EE83-52CB-E118-49CB-3EBDD6EF25B9}"/>
-            </a:ext>
-          </a:extLst>
-        </p:cNvPr>
+        <p:cNvPr id="1" name=""/>
         <p:cNvGrpSpPr/>
         <p:nvPr/>
       </p:nvGrpSpPr>
@@ -1752,13 +1621,7 @@
       </p:grpSpPr>
       <p:sp>
         <p:nvSpPr>
-          <p:cNvPr id="2" name="슬라이드 이미지 개체 틀 1">
-            <a:extLst>
-              <a:ext uri="{FF2B5EF4-FFF2-40B4-BE49-F238E27FC236}">
-                <a16:creationId xmlns:a16="http://schemas.microsoft.com/office/drawing/2014/main" id="{30F83B01-3943-C359-9322-8EB719FB824B}"/>
-              </a:ext>
-            </a:extLst>
-          </p:cNvPr>
+          <p:cNvPr id="2" name="슬라이드 이미지 개체 틀 1"/>
           <p:cNvSpPr>
             <a:spLocks noGrp="1" noRot="1" noChangeAspect="1"/>
           </p:cNvSpPr>
@@ -1770,13 +1633,7 @@
       </p:sp>
       <p:sp>
         <p:nvSpPr>
-          <p:cNvPr id="3" name="슬라이드 노트 개체 틀 2">
-            <a:extLst>
-              <a:ext uri="{FF2B5EF4-FFF2-40B4-BE49-F238E27FC236}">
-                <a16:creationId xmlns:a16="http://schemas.microsoft.com/office/drawing/2014/main" id="{F2F259CF-8156-0FB2-87BB-C2421F329EA1}"/>
-              </a:ext>
-            </a:extLst>
-          </p:cNvPr>
+          <p:cNvPr id="3" name="슬라이드 노트 개체 틀 2"/>
           <p:cNvSpPr>
             <a:spLocks noGrp="1"/>
           </p:cNvSpPr>
@@ -1789,24 +1646,163 @@
           <a:bodyPr/>
           <a:lstStyle/>
           <a:p>
+            <a:r>
+              <a:rPr lang="ko-KR" altLang="en-US" dirty="0"/>
+              <a:t>“지금까지 우리는</a:t>
+            </a:r>
+            <a:br>
+              <a:rPr lang="ko-KR" altLang="en-US" dirty="0"/>
+            </a:br>
+            <a:r>
+              <a:rPr lang="ko-KR" altLang="en-US" dirty="0"/>
+              <a:t>모델이 무엇인지</a:t>
+            </a:r>
+            <a:r>
+              <a:rPr lang="en-US" altLang="ko-KR" dirty="0"/>
+              <a:t>,</a:t>
+            </a:r>
+            <a:br>
+              <a:rPr lang="en-US" altLang="ko-KR" dirty="0"/>
+            </a:br>
+            <a:r>
+              <a:rPr lang="ko-KR" altLang="en-US" dirty="0"/>
+              <a:t>학습이 무엇인지 개념적으로 봤습니다</a:t>
+            </a:r>
+            <a:r>
+              <a:rPr lang="en-US" altLang="ko-KR" dirty="0"/>
+              <a:t>.</a:t>
+            </a:r>
+          </a:p>
+          <a:p>
+            <a:r>
+              <a:rPr lang="ko-KR" altLang="en-US" dirty="0"/>
+              <a:t>이제부터는</a:t>
+            </a:r>
+            <a:br>
+              <a:rPr lang="ko-KR" altLang="en-US" dirty="0"/>
+            </a:br>
+            <a:r>
+              <a:rPr lang="ko-KR" altLang="en-US" dirty="0"/>
+              <a:t>가장 단순한 모델인 </a:t>
+            </a:r>
+            <a:r>
+              <a:rPr lang="ko-KR" altLang="en-US" b="1" dirty="0"/>
+              <a:t>회귀</a:t>
+            </a:r>
+            <a:r>
+              <a:rPr lang="ko-KR" altLang="en-US" dirty="0"/>
+              <a:t>를 통해</a:t>
+            </a:r>
+            <a:br>
+              <a:rPr lang="ko-KR" altLang="en-US" dirty="0"/>
+            </a:br>
+            <a:r>
+              <a:rPr lang="ko-KR" altLang="en-US" dirty="0"/>
+              <a:t>‘모델이 실제로 어떻게 </a:t>
+            </a:r>
+            <a:r>
+              <a:rPr lang="ko-KR" altLang="en-US" dirty="0" err="1"/>
+              <a:t>학습되는지’를</a:t>
+            </a:r>
+            <a:br>
+              <a:rPr lang="ko-KR" altLang="en-US" dirty="0"/>
+            </a:br>
+            <a:r>
+              <a:rPr lang="ko-KR" altLang="en-US" dirty="0"/>
+              <a:t>하나씩 뜯어보겠습니다</a:t>
+            </a:r>
+            <a:r>
+              <a:rPr lang="en-US" altLang="ko-KR" dirty="0"/>
+              <a:t>.</a:t>
+            </a:r>
+          </a:p>
+          <a:p>
+            <a:r>
+              <a:rPr lang="ko-KR" altLang="en-US" dirty="0"/>
+              <a:t>그 핵심 규칙이</a:t>
+            </a:r>
+            <a:br>
+              <a:rPr lang="ko-KR" altLang="en-US" dirty="0"/>
+            </a:br>
+            <a:r>
+              <a:rPr lang="ko-KR" altLang="en-US" dirty="0"/>
+              <a:t>바로 </a:t>
+            </a:r>
+            <a:r>
+              <a:rPr lang="ko-KR" altLang="en-US" b="1" dirty="0" err="1"/>
+              <a:t>경사하강법</a:t>
+            </a:r>
+            <a:r>
+              <a:rPr lang="ko-KR" altLang="en-US" dirty="0" err="1"/>
+              <a:t>입니다</a:t>
+            </a:r>
+            <a:r>
+              <a:rPr lang="en-US" altLang="ko-KR" dirty="0"/>
+              <a:t>.”</a:t>
+            </a:r>
+          </a:p>
+          <a:p>
+            <a:endParaRPr lang="en-US" altLang="ko-KR" dirty="0"/>
+          </a:p>
+          <a:p>
+            <a:pPr marL="0" marR="0" lvl="0" indent="0" algn="l" defTabSz="914400" rtl="0" eaLnBrk="1" fontAlgn="auto" latinLnBrk="1" hangingPunct="1">
+              <a:lnSpc>
+                <a:spcPct val="100000"/>
+              </a:lnSpc>
+              <a:spcBef>
+                <a:spcPts val="0"/>
+              </a:spcBef>
+              <a:spcAft>
+                <a:spcPts val="0"/>
+              </a:spcAft>
+              <a:buClrTx/>
+              <a:buSzTx/>
+              <a:buFontTx/>
+              <a:buNone/>
+              <a:tabLst/>
+              <a:defRPr/>
+            </a:pPr>
+            <a:r>
+              <a:rPr lang="ko-KR" altLang="en-US" dirty="0"/>
+              <a:t>“</a:t>
+            </a:r>
+            <a:r>
+              <a:rPr lang="ko-KR" altLang="en-US" dirty="0" err="1"/>
+              <a:t>경사하강법은</a:t>
+            </a:r>
+            <a:br>
+              <a:rPr lang="ko-KR" altLang="en-US" dirty="0"/>
+            </a:br>
+            <a:r>
+              <a:rPr lang="ko-KR" altLang="en-US" dirty="0"/>
+              <a:t>‘어디로 얼마나 </a:t>
+            </a:r>
+            <a:r>
+              <a:rPr lang="ko-KR" altLang="en-US" dirty="0" err="1"/>
+              <a:t>고칠지’를</a:t>
+            </a:r>
+            <a:r>
+              <a:rPr lang="ko-KR" altLang="en-US" dirty="0"/>
+              <a:t> 정하는 규칙입니다</a:t>
+            </a:r>
+            <a:r>
+              <a:rPr lang="en-US" altLang="ko-KR"/>
+              <a:t>.”</a:t>
+            </a:r>
+          </a:p>
+          <a:p>
             <a:endParaRPr lang="ko-KR" altLang="en-US" dirty="0"/>
           </a:p>
         </p:txBody>
       </p:sp>
       <p:sp>
         <p:nvSpPr>
-          <p:cNvPr id="4" name="슬라이드 번호 개체 틀 3">
-            <a:extLst>
-              <a:ext uri="{FF2B5EF4-FFF2-40B4-BE49-F238E27FC236}">
-                <a16:creationId xmlns:a16="http://schemas.microsoft.com/office/drawing/2014/main" id="{5301DD34-5BFE-877A-E657-9B3A6B1B5CDD}"/>
-              </a:ext>
-            </a:extLst>
-          </p:cNvPr>
+          <p:cNvPr id="4" name="슬라이드 번호 개체 틀 3"/>
           <p:cNvSpPr>
             <a:spLocks noGrp="1"/>
           </p:cNvSpPr>
           <p:nvPr>
-            <p:ph type="sldNum" sz="quarter" idx="10"/>
+            <p:ph type="sldNum" sz="quarter" idx="5"/>
           </p:nvPr>
         </p:nvSpPr>
         <p:spPr/>
@@ -1814,18 +1810,19 @@
           <a:bodyPr/>
           <a:lstStyle/>
           <a:p>
-            <a:fld id="{A0085365-8376-4996-BDD6-F39608FADAF3}" type="slidenum">
+            <a:fld id="{3E35EA20-6519-4513-9EDC-C89C5369BAEC}" type="slidenum">
               <a:rPr lang="ko-KR" altLang="en-US" smtClean="0"/>
-              <a:t>42</a:t>
+              <a:pPr/>
+              <a:t>41</a:t>
             </a:fld>
-            <a:endParaRPr lang="ko-KR" altLang="en-US"/>
+            <a:endParaRPr lang="ko-KR" altLang="en-US" dirty="0"/>
           </a:p>
         </p:txBody>
       </p:sp>
     </p:spTree>
     <p:extLst>
       <p:ext uri="{BB962C8B-B14F-4D97-AF65-F5344CB8AC3E}">
-        <p14:creationId xmlns:p14="http://schemas.microsoft.com/office/powerpoint/2010/main" val="2391645545"/>
+        <p14:creationId xmlns:p14="http://schemas.microsoft.com/office/powerpoint/2010/main" val="2246056440"/>
       </p:ext>
     </p:extLst>
   </p:cSld>
@@ -1911,6 +1908,114 @@
     <p:extLst>
       <p:ext uri="{BB962C8B-B14F-4D97-AF65-F5344CB8AC3E}">
         <p14:creationId xmlns:p14="http://schemas.microsoft.com/office/powerpoint/2010/main" val="2959887629"/>
+      </p:ext>
+    </p:extLst>
+  </p:cSld>
+  <p:clrMapOvr>
+    <a:masterClrMapping/>
+  </p:clrMapOvr>
+</p:notes>
+</file>
+
+<file path=ppt/notesSlides/notesSlide20.xml><?xml version="1.0" encoding="utf-8"?>
+<p:notes xmlns:a="http://schemas.openxmlformats.org/drawingml/2006/main" xmlns:r="http://schemas.openxmlformats.org/officeDocument/2006/relationships" xmlns:p="http://schemas.openxmlformats.org/presentationml/2006/main">
+  <p:cSld>
+    <p:spTree>
+      <p:nvGrpSpPr>
+        <p:cNvPr id="1" name="">
+          <a:extLst>
+            <a:ext uri="{FF2B5EF4-FFF2-40B4-BE49-F238E27FC236}">
+              <a16:creationId xmlns:a16="http://schemas.microsoft.com/office/drawing/2014/main" id="{A9D2EE83-52CB-E118-49CB-3EBDD6EF25B9}"/>
+            </a:ext>
+          </a:extLst>
+        </p:cNvPr>
+        <p:cNvGrpSpPr/>
+        <p:nvPr/>
+      </p:nvGrpSpPr>
+      <p:grpSpPr>
+        <a:xfrm>
+          <a:off x="0" y="0"/>
+          <a:ext cx="0" cy="0"/>
+          <a:chOff x="0" y="0"/>
+          <a:chExt cx="0" cy="0"/>
+        </a:xfrm>
+      </p:grpSpPr>
+      <p:sp>
+        <p:nvSpPr>
+          <p:cNvPr id="2" name="슬라이드 이미지 개체 틀 1">
+            <a:extLst>
+              <a:ext uri="{FF2B5EF4-FFF2-40B4-BE49-F238E27FC236}">
+                <a16:creationId xmlns:a16="http://schemas.microsoft.com/office/drawing/2014/main" id="{30F83B01-3943-C359-9322-8EB719FB824B}"/>
+              </a:ext>
+            </a:extLst>
+          </p:cNvPr>
+          <p:cNvSpPr>
+            <a:spLocks noGrp="1" noRot="1" noChangeAspect="1"/>
+          </p:cNvSpPr>
+          <p:nvPr>
+            <p:ph type="sldImg"/>
+          </p:nvPr>
+        </p:nvSpPr>
+        <p:spPr/>
+      </p:sp>
+      <p:sp>
+        <p:nvSpPr>
+          <p:cNvPr id="3" name="슬라이드 노트 개체 틀 2">
+            <a:extLst>
+              <a:ext uri="{FF2B5EF4-FFF2-40B4-BE49-F238E27FC236}">
+                <a16:creationId xmlns:a16="http://schemas.microsoft.com/office/drawing/2014/main" id="{F2F259CF-8156-0FB2-87BB-C2421F329EA1}"/>
+              </a:ext>
+            </a:extLst>
+          </p:cNvPr>
+          <p:cNvSpPr>
+            <a:spLocks noGrp="1"/>
+          </p:cNvSpPr>
+          <p:nvPr>
+            <p:ph type="body" idx="1"/>
+          </p:nvPr>
+        </p:nvSpPr>
+        <p:spPr/>
+        <p:txBody>
+          <a:bodyPr/>
+          <a:lstStyle/>
+          <a:p>
+            <a:endParaRPr lang="ko-KR" altLang="en-US" dirty="0"/>
+          </a:p>
+        </p:txBody>
+      </p:sp>
+      <p:sp>
+        <p:nvSpPr>
+          <p:cNvPr id="4" name="슬라이드 번호 개체 틀 3">
+            <a:extLst>
+              <a:ext uri="{FF2B5EF4-FFF2-40B4-BE49-F238E27FC236}">
+                <a16:creationId xmlns:a16="http://schemas.microsoft.com/office/drawing/2014/main" id="{5301DD34-5BFE-877A-E657-9B3A6B1B5CDD}"/>
+              </a:ext>
+            </a:extLst>
+          </p:cNvPr>
+          <p:cNvSpPr>
+            <a:spLocks noGrp="1"/>
+          </p:cNvSpPr>
+          <p:nvPr>
+            <p:ph type="sldNum" sz="quarter" idx="10"/>
+          </p:nvPr>
+        </p:nvSpPr>
+        <p:spPr/>
+        <p:txBody>
+          <a:bodyPr/>
+          <a:lstStyle/>
+          <a:p>
+            <a:fld id="{A0085365-8376-4996-BDD6-F39608FADAF3}" type="slidenum">
+              <a:rPr lang="ko-KR" altLang="en-US" smtClean="0"/>
+              <a:t>42</a:t>
+            </a:fld>
+            <a:endParaRPr lang="ko-KR" altLang="en-US"/>
+          </a:p>
+        </p:txBody>
+      </p:sp>
+    </p:spTree>
+    <p:extLst>
+      <p:ext uri="{BB962C8B-B14F-4D97-AF65-F5344CB8AC3E}">
+        <p14:creationId xmlns:p14="http://schemas.microsoft.com/office/powerpoint/2010/main" val="2391645545"/>
       </p:ext>
     </p:extLst>
   </p:cSld>
@@ -2938,7 +3043,7 @@
           <a:p>
             <a:fld id="{442BEE3F-2E9A-4FD8-8B8A-8619F3E161C0}" type="datetime1">
               <a:rPr lang="ko-KR" altLang="en-US" smtClean="0"/>
-              <a:t>2026-02-10</a:t>
+              <a:t>2026-02-12</a:t>
             </a:fld>
             <a:endParaRPr lang="ko-KR" altLang="en-US"/>
           </a:p>
@@ -3225,7 +3330,7 @@
           <a:p>
             <a:fld id="{0F78D9C4-20C1-4B15-A116-16DC77AD9A1E}" type="datetime1">
               <a:rPr lang="ko-KR" altLang="en-US" smtClean="0"/>
-              <a:t>2026-02-10</a:t>
+              <a:t>2026-02-12</a:t>
             </a:fld>
             <a:endParaRPr lang="ko-KR" altLang="en-US"/>
           </a:p>
@@ -3400,7 +3505,7 @@
           <a:p>
             <a:fld id="{7F5E23C3-0E3D-4E4E-8486-D7FB4C073DC1}" type="datetime1">
               <a:rPr lang="ko-KR" altLang="en-US" smtClean="0"/>
-              <a:t>2026-02-10</a:t>
+              <a:t>2026-02-12</a:t>
             </a:fld>
             <a:endParaRPr lang="ko-KR" altLang="en-US"/>
           </a:p>
@@ -3729,7 +3834,7 @@
           <a:p>
             <a:fld id="{7F5E23C3-0E3D-4E4E-8486-D7FB4C073DC1}" type="datetime1">
               <a:rPr lang="ko-KR" altLang="en-US" smtClean="0"/>
-              <a:t>2026-02-10</a:t>
+              <a:t>2026-02-12</a:t>
             </a:fld>
             <a:endParaRPr lang="ko-KR" altLang="en-US"/>
           </a:p>
@@ -5018,7 +5123,7 @@
           <a:p>
             <a:fld id="{0F78D9C4-20C1-4B15-A116-16DC77AD9A1E}" type="datetime1">
               <a:rPr lang="ko-KR" altLang="en-US" smtClean="0"/>
-              <a:t>2026-02-10</a:t>
+              <a:t>2026-02-12</a:t>
             </a:fld>
             <a:endParaRPr lang="ko-KR" altLang="en-US"/>
           </a:p>
@@ -5442,7 +5547,7 @@
           <a:p>
             <a:fld id="{0F78D9C4-20C1-4B15-A116-16DC77AD9A1E}" type="datetime1">
               <a:rPr lang="ko-KR" altLang="en-US" smtClean="0"/>
-              <a:t>2026-02-10</a:t>
+              <a:t>2026-02-12</a:t>
             </a:fld>
             <a:endParaRPr lang="ko-KR" altLang="en-US"/>
           </a:p>
@@ -5847,7 +5952,7 @@
           <a:p>
             <a:fld id="{0F78D9C4-20C1-4B15-A116-16DC77AD9A1E}" type="datetime1">
               <a:rPr lang="ko-KR" altLang="en-US" smtClean="0"/>
-              <a:t>2026-02-10</a:t>
+              <a:t>2026-02-12</a:t>
             </a:fld>
             <a:endParaRPr lang="ko-KR" altLang="en-US"/>
           </a:p>
@@ -6230,7 +6335,7 @@
           <a:p>
             <a:fld id="{0F78D9C4-20C1-4B15-A116-16DC77AD9A1E}" type="datetime1">
               <a:rPr lang="ko-KR" altLang="en-US" smtClean="0"/>
-              <a:t>2026-02-10</a:t>
+              <a:t>2026-02-12</a:t>
             </a:fld>
             <a:endParaRPr lang="ko-KR" altLang="en-US"/>
           </a:p>
@@ -6349,7 +6454,7 @@
           <a:p>
             <a:fld id="{0F78D9C4-20C1-4B15-A116-16DC77AD9A1E}" type="datetime1">
               <a:rPr lang="ko-KR" altLang="en-US" smtClean="0"/>
-              <a:t>2026-02-10</a:t>
+              <a:t>2026-02-12</a:t>
             </a:fld>
             <a:endParaRPr lang="ko-KR" altLang="en-US"/>
           </a:p>
@@ -6697,7 +6802,7 @@
           <a:p>
             <a:fld id="{0F78D9C4-20C1-4B15-A116-16DC77AD9A1E}" type="datetime1">
               <a:rPr lang="ko-KR" altLang="en-US" smtClean="0"/>
-              <a:t>2026-02-10</a:t>
+              <a:t>2026-02-12</a:t>
             </a:fld>
             <a:endParaRPr lang="ko-KR" altLang="en-US"/>
           </a:p>
@@ -7011,7 +7116,7 @@
           <a:p>
             <a:fld id="{0F78D9C4-20C1-4B15-A116-16DC77AD9A1E}" type="datetime1">
               <a:rPr lang="ko-KR" altLang="en-US" smtClean="0"/>
-              <a:t>2026-02-10</a:t>
+              <a:t>2026-02-12</a:t>
             </a:fld>
             <a:endParaRPr lang="ko-KR" altLang="en-US"/>
           </a:p>
@@ -7141,7 +7246,7 @@
           <a:p>
             <a:fld id="{0F78D9C4-20C1-4B15-A116-16DC77AD9A1E}" type="datetime1">
               <a:rPr lang="ko-KR" altLang="en-US" smtClean="0"/>
-              <a:t>2026-02-10</a:t>
+              <a:t>2026-02-12</a:t>
             </a:fld>
             <a:endParaRPr lang="ko-KR" altLang="en-US"/>
           </a:p>
@@ -7807,7 +7912,7 @@
           <a:p>
             <a:fld id="{0F78D9C4-20C1-4B15-A116-16DC77AD9A1E}" type="datetime1">
               <a:rPr lang="ko-KR" altLang="en-US" smtClean="0"/>
-              <a:t>2026-02-10</a:t>
+              <a:t>2026-02-12</a:t>
             </a:fld>
             <a:endParaRPr lang="ko-KR" altLang="en-US"/>
           </a:p>
@@ -8189,7 +8294,7 @@
           <a:p>
             <a:fld id="{0F78D9C4-20C1-4B15-A116-16DC77AD9A1E}" type="datetime1">
               <a:rPr lang="ko-KR" altLang="en-US" smtClean="0"/>
-              <a:t>2026-02-10</a:t>
+              <a:t>2026-02-12</a:t>
             </a:fld>
             <a:endParaRPr lang="ko-KR" altLang="en-US"/>
           </a:p>
@@ -8308,7 +8413,7 @@
           <a:p>
             <a:fld id="{0F78D9C4-20C1-4B15-A116-16DC77AD9A1E}" type="datetime1">
               <a:rPr lang="ko-KR" altLang="en-US" smtClean="0"/>
-              <a:t>2026-02-10</a:t>
+              <a:t>2026-02-12</a:t>
             </a:fld>
             <a:endParaRPr lang="ko-KR" altLang="en-US"/>
           </a:p>
@@ -8448,7 +8553,7 @@
           <a:p>
             <a:fld id="{0F78D9C4-20C1-4B15-A116-16DC77AD9A1E}" type="datetime1">
               <a:rPr lang="ko-KR" altLang="en-US" smtClean="0"/>
-              <a:t>2026-02-10</a:t>
+              <a:t>2026-02-12</a:t>
             </a:fld>
             <a:endParaRPr lang="ko-KR" altLang="en-US"/>
           </a:p>
@@ -8595,7 +8700,7 @@
           <a:p>
             <a:fld id="{0F78D9C4-20C1-4B15-A116-16DC77AD9A1E}" type="datetime1">
               <a:rPr lang="ko-KR" altLang="en-US" smtClean="0"/>
-              <a:t>2026-02-10</a:t>
+              <a:t>2026-02-12</a:t>
             </a:fld>
             <a:endParaRPr lang="ko-KR" altLang="en-US"/>
           </a:p>
@@ -8855,7 +8960,7 @@
           <a:p>
             <a:fld id="{0F78D9C4-20C1-4B15-A116-16DC77AD9A1E}" type="datetime1">
               <a:rPr lang="ko-KR" altLang="en-US" smtClean="0"/>
-              <a:t>2026-02-10</a:t>
+              <a:t>2026-02-12</a:t>
             </a:fld>
             <a:endParaRPr lang="ko-KR" altLang="en-US"/>
           </a:p>
@@ -9277,7 +9382,7 @@
           <a:p>
             <a:fld id="{0F78D9C4-20C1-4B15-A116-16DC77AD9A1E}" type="datetime1">
               <a:rPr lang="ko-KR" altLang="en-US" smtClean="0"/>
-              <a:t>2026-02-10</a:t>
+              <a:t>2026-02-12</a:t>
             </a:fld>
             <a:endParaRPr lang="ko-KR" altLang="en-US"/>
           </a:p>
@@ -9640,7 +9745,7 @@
           <a:p>
             <a:fld id="{0F78D9C4-20C1-4B15-A116-16DC77AD9A1E}" type="datetime1">
               <a:rPr lang="ko-KR" altLang="en-US" smtClean="0"/>
-              <a:t>2026-02-10</a:t>
+              <a:t>2026-02-12</a:t>
             </a:fld>
             <a:endParaRPr lang="ko-KR" altLang="en-US"/>
           </a:p>
@@ -10009,7 +10114,7 @@
           <a:p>
             <a:fld id="{0F78D9C4-20C1-4B15-A116-16DC77AD9A1E}" type="datetime1">
               <a:rPr lang="ko-KR" altLang="en-US" smtClean="0"/>
-              <a:t>2026-02-10</a:t>
+              <a:t>2026-02-12</a:t>
             </a:fld>
             <a:endParaRPr lang="ko-KR" altLang="en-US"/>
           </a:p>
@@ -10454,7 +10559,7 @@
           <a:p>
             <a:fld id="{0F78D9C4-20C1-4B15-A116-16DC77AD9A1E}" type="datetime1">
               <a:rPr lang="ko-KR" altLang="en-US" smtClean="0"/>
-              <a:t>2026-02-10</a:t>
+              <a:t>2026-02-12</a:t>
             </a:fld>
             <a:endParaRPr lang="ko-KR" altLang="en-US"/>
           </a:p>
@@ -10970,7 +11075,7 @@
           <a:p>
             <a:fld id="{0F78D9C4-20C1-4B15-A116-16DC77AD9A1E}" type="datetime1">
               <a:rPr lang="ko-KR" altLang="en-US" smtClean="0"/>
-              <a:t>2026-02-10</a:t>
+              <a:t>2026-02-12</a:t>
             </a:fld>
             <a:endParaRPr lang="ko-KR" altLang="en-US"/>
           </a:p>
@@ -11494,7 +11599,7 @@
           <a:p>
             <a:fld id="{0F78D9C4-20C1-4B15-A116-16DC77AD9A1E}" type="datetime1">
               <a:rPr lang="ko-KR" altLang="en-US" smtClean="0"/>
-              <a:t>2026-02-10</a:t>
+              <a:t>2026-02-12</a:t>
             </a:fld>
             <a:endParaRPr lang="ko-KR" altLang="en-US"/>
           </a:p>
@@ -11966,7 +12071,7 @@
           <a:p>
             <a:fld id="{0F78D9C4-20C1-4B15-A116-16DC77AD9A1E}" type="datetime1">
               <a:rPr lang="ko-KR" altLang="en-US" smtClean="0"/>
-              <a:t>2026-02-10</a:t>
+              <a:t>2026-02-12</a:t>
             </a:fld>
             <a:endParaRPr lang="ko-KR" altLang="en-US"/>
           </a:p>
@@ -12556,7 +12661,7 @@
           <a:p>
             <a:fld id="{0F78D9C4-20C1-4B15-A116-16DC77AD9A1E}" type="datetime1">
               <a:rPr lang="ko-KR" altLang="en-US" smtClean="0"/>
-              <a:t>2026-02-10</a:t>
+              <a:t>2026-02-12</a:t>
             </a:fld>
             <a:endParaRPr lang="ko-KR" altLang="en-US"/>
           </a:p>
@@ -12972,7 +13077,7 @@
           <a:p>
             <a:fld id="{0F78D9C4-20C1-4B15-A116-16DC77AD9A1E}" type="datetime1">
               <a:rPr lang="ko-KR" altLang="en-US" smtClean="0"/>
-              <a:t>2026-02-10</a:t>
+              <a:t>2026-02-12</a:t>
             </a:fld>
             <a:endParaRPr lang="ko-KR" altLang="en-US"/>
           </a:p>
@@ -13440,7 +13545,7 @@
           <a:p>
             <a:fld id="{0F78D9C4-20C1-4B15-A116-16DC77AD9A1E}" type="datetime1">
               <a:rPr lang="ko-KR" altLang="en-US" smtClean="0"/>
-              <a:t>2026-02-10</a:t>
+              <a:t>2026-02-12</a:t>
             </a:fld>
             <a:endParaRPr lang="ko-KR" altLang="en-US"/>
           </a:p>
@@ -15084,7 +15189,7 @@
           <a:p>
             <a:fld id="{0F78D9C4-20C1-4B15-A116-16DC77AD9A1E}" type="datetime1">
               <a:rPr lang="ko-KR" altLang="en-US" smtClean="0"/>
-              <a:t>2026-02-10</a:t>
+              <a:t>2026-02-12</a:t>
             </a:fld>
             <a:endParaRPr lang="ko-KR" altLang="en-US"/>
           </a:p>
@@ -15213,7 +15318,7 @@
           <a:p>
             <a:fld id="{0F78D9C4-20C1-4B15-A116-16DC77AD9A1E}" type="datetime1">
               <a:rPr lang="ko-KR" altLang="en-US" smtClean="0"/>
-              <a:t>2026-02-10</a:t>
+              <a:t>2026-02-12</a:t>
             </a:fld>
             <a:endParaRPr lang="ko-KR" altLang="en-US"/>
           </a:p>
@@ -15358,7 +15463,7 @@
           <a:p>
             <a:fld id="{0F78D9C4-20C1-4B15-A116-16DC77AD9A1E}" type="datetime1">
               <a:rPr lang="ko-KR" altLang="en-US" smtClean="0"/>
-              <a:t>2026-02-10</a:t>
+              <a:t>2026-02-12</a:t>
             </a:fld>
             <a:endParaRPr lang="ko-KR" altLang="en-US"/>
           </a:p>
@@ -15686,7 +15791,7 @@
           <a:p>
             <a:fld id="{0F78D9C4-20C1-4B15-A116-16DC77AD9A1E}" type="datetime1">
               <a:rPr lang="ko-KR" altLang="en-US" smtClean="0"/>
-              <a:t>2026-02-10</a:t>
+              <a:t>2026-02-12</a:t>
             </a:fld>
             <a:endParaRPr lang="ko-KR" altLang="en-US"/>
           </a:p>
@@ -15918,7 +16023,7 @@
           <a:p>
             <a:fld id="{0F78D9C4-20C1-4B15-A116-16DC77AD9A1E}" type="datetime1">
               <a:rPr lang="ko-KR" altLang="en-US" smtClean="0"/>
-              <a:t>2026-02-10</a:t>
+              <a:t>2026-02-12</a:t>
             </a:fld>
             <a:endParaRPr lang="ko-KR" altLang="en-US"/>
           </a:p>
@@ -16258,7 +16363,7 @@
           <a:p>
             <a:fld id="{0F78D9C4-20C1-4B15-A116-16DC77AD9A1E}" type="datetime1">
               <a:rPr lang="ko-KR" altLang="en-US" smtClean="0"/>
-              <a:t>2026-02-10</a:t>
+              <a:t>2026-02-12</a:t>
             </a:fld>
             <a:endParaRPr lang="ko-KR" altLang="en-US"/>
           </a:p>
@@ -16536,7 +16641,7 @@
           <a:p>
             <a:fld id="{0F78D9C4-20C1-4B15-A116-16DC77AD9A1E}" type="datetime1">
               <a:rPr lang="ko-KR" altLang="en-US" smtClean="0"/>
-              <a:t>2026-02-10</a:t>
+              <a:t>2026-02-12</a:t>
             </a:fld>
             <a:endParaRPr lang="ko-KR" altLang="en-US"/>
           </a:p>
@@ -16872,7 +16977,7 @@
           <a:p>
             <a:fld id="{0F78D9C4-20C1-4B15-A116-16DC77AD9A1E}" type="datetime1">
               <a:rPr lang="ko-KR" altLang="en-US" smtClean="0"/>
-              <a:t>2026-02-10</a:t>
+              <a:t>2026-02-12</a:t>
             </a:fld>
             <a:endParaRPr lang="ko-KR" altLang="en-US"/>
           </a:p>
@@ -17254,7 +17359,7 @@
           <a:p>
             <a:fld id="{0F78D9C4-20C1-4B15-A116-16DC77AD9A1E}" type="datetime1">
               <a:rPr lang="ko-KR" altLang="en-US" smtClean="0"/>
-              <a:t>2026-02-10</a:t>
+              <a:t>2026-02-12</a:t>
             </a:fld>
             <a:endParaRPr lang="ko-KR" altLang="en-US"/>
           </a:p>
@@ -17996,7 +18101,7 @@
           <a:p>
             <a:fld id="{0F78D9C4-20C1-4B15-A116-16DC77AD9A1E}" type="datetime1">
               <a:rPr lang="ko-KR" altLang="en-US" smtClean="0"/>
-              <a:t>2026-02-10</a:t>
+              <a:t>2026-02-12</a:t>
             </a:fld>
             <a:endParaRPr lang="ko-KR" altLang="en-US"/>
           </a:p>
@@ -18548,7 +18653,7 @@
           <a:p>
             <a:fld id="{0F78D9C4-20C1-4B15-A116-16DC77AD9A1E}" type="datetime1">
               <a:rPr lang="ko-KR" altLang="en-US" smtClean="0"/>
-              <a:t>2026-02-10</a:t>
+              <a:t>2026-02-12</a:t>
             </a:fld>
             <a:endParaRPr lang="ko-KR" altLang="en-US"/>
           </a:p>
@@ -18953,7 +19058,7 @@
           <a:p>
             <a:fld id="{0F78D9C4-20C1-4B15-A116-16DC77AD9A1E}" type="datetime1">
               <a:rPr lang="ko-KR" altLang="en-US" smtClean="0"/>
-              <a:t>2026-02-10</a:t>
+              <a:t>2026-02-12</a:t>
             </a:fld>
             <a:endParaRPr lang="ko-KR" altLang="en-US"/>
           </a:p>
@@ -19353,7 +19458,7 @@
           <a:p>
             <a:fld id="{0F78D9C4-20C1-4B15-A116-16DC77AD9A1E}" type="datetime1">
               <a:rPr lang="ko-KR" altLang="en-US" smtClean="0"/>
-              <a:t>2026-02-10</a:t>
+              <a:t>2026-02-12</a:t>
             </a:fld>
             <a:endParaRPr lang="ko-KR" altLang="en-US"/>
           </a:p>
@@ -19606,7 +19711,7 @@
           <a:p>
             <a:fld id="{0F78D9C4-20C1-4B15-A116-16DC77AD9A1E}" type="datetime1">
               <a:rPr lang="ko-KR" altLang="en-US" smtClean="0"/>
-              <a:t>2026-02-10</a:t>
+              <a:t>2026-02-12</a:t>
             </a:fld>
             <a:endParaRPr lang="ko-KR" altLang="en-US"/>
           </a:p>
